--- a/QR_Experiments_Cognitive_Biases_EN.pptx
+++ b/QR_Experiments_Cognitive_Biases_EN.pptx
@@ -3205,7 +3205,7 @@
               </a:defRPr>
             </a:pPr>
             <a:r>
-              <a:t>9. The Linda Problem — Conjunction Fallacy</a:t>
+              <a:t>9. Linda's Profile (Kahneman &amp; Tversky)</a:t>
             </a:r>
           </a:p>
         </p:txBody>
@@ -3218,8 +3218,8 @@
         </p:nvSpPr>
         <p:spPr>
           <a:xfrm>
-            <a:off x="548640" y="1188720"/>
-            <a:ext cx="5303520" cy="5029200"/>
+            <a:off x="548640" y="1005840"/>
+            <a:ext cx="8229600" cy="457200"/>
           </a:xfrm>
           <a:prstGeom prst="rect">
             <a:avLst/>
@@ -3233,60 +3233,65 @@
           <a:lstStyle/>
           <a:p>
             <a:pPr>
-              <a:defRPr sz="1300">
-                <a:solidFill>
-                  <a:srgbClr val="3C3C3C"/>
-                </a:solidFill>
-              </a:defRPr>
-            </a:pPr>
-            <a:r>
-              <a:t>📌 Scenario:</a:t>
+              <a:defRPr sz="1400" b="1">
+                <a:solidFill>
+                  <a:srgbClr val="FF6584"/>
+                </a:solidFill>
+              </a:defRPr>
+            </a:pPr>
+            <a:r>
+              <a:t>🧠 Cognitive Bias: Conjunction Fallacy &amp; Representativeness Heuristic</a:t>
+            </a:r>
+          </a:p>
+        </p:txBody>
+      </p:sp>
+      <p:sp>
+        <p:nvSpPr>
+          <p:cNvPr id="4" name="TextBox 3"/>
+          <p:cNvSpPr txBox="1"/>
+          <p:nvPr/>
+        </p:nvSpPr>
+        <p:spPr>
+          <a:xfrm>
+            <a:off x="548640" y="1645920"/>
+            <a:ext cx="5120640" cy="4572000"/>
+          </a:xfrm>
+          <a:prstGeom prst="rect">
+            <a:avLst/>
+          </a:prstGeom>
+          <a:noFill/>
+        </p:spPr>
+        <p:txBody>
+          <a:bodyPr wrap="square">
+            <a:spAutoFit/>
+          </a:bodyPr>
+          <a:lstStyle/>
+          <a:p>
+            <a:pPr>
+              <a:defRPr sz="1500">
+                <a:solidFill>
+                  <a:srgbClr val="323232"/>
+                </a:solidFill>
+              </a:defRPr>
+            </a:pPr>
+            <a:r>
+              <a:t>📌 Context &amp; Instructions:</a:t>
             </a:r>
             <a:br/>
             <a:r>
-              <a:t>Linda is 31, single, outspoken, bright, philosophy major, deeply concerned with social justice and anti-nuclear protests.</a:t>
+              <a:t>Linda is 31, single, outspoken, bright, philosophy major, concerned with social justice and anti-nuclear demonstrations.</a:t>
             </a:r>
             <a:br/>
-          </a:p>
-          <a:p>
-            <a:pPr>
-              <a:defRPr sz="1200" b="1">
-                <a:solidFill>
-                  <a:srgbClr val="1E5AC8"/>
-                </a:solidFill>
-              </a:defRPr>
-            </a:pPr>
-            <a:r>
-              <a:t>🅰️ Gruppo A / Group A:</a:t>
-            </a:r>
             <a:br/>
             <a:r>
-              <a:t>What is the probability (0-100%) that Linda is a bank teller?</a:t>
-            </a:r>
-            <a:br/>
-          </a:p>
-          <a:p>
-            <a:pPr>
-              <a:defRPr sz="1200" b="1">
-                <a:solidFill>
-                  <a:srgbClr val="C8325A"/>
-                </a:solidFill>
-              </a:defRPr>
-            </a:pPr>
-            <a:r>
-              <a:t>🅱️ Gruppo B / Group B:</a:t>
-            </a:r>
-            <a:br/>
-            <a:r>
-              <a:t>What is the probability (0-100%) that Linda is a bank teller and active in the feminist movement?</a:t>
-            </a:r>
-            <a:br/>
+              <a:t>Scan the QR code to estimate the probability of her current occupation.</a:t>
+            </a:r>
           </a:p>
         </p:txBody>
       </p:sp>
       <p:pic>
         <p:nvPicPr>
-          <p:cNvPr id="4" name="Picture 3" descr="Problema_Linda_EN.png"/>
+          <p:cNvPr id="5" name="Picture 4" descr="Problema_Linda_EN.png"/>
           <p:cNvPicPr>
             <a:picLocks noChangeAspect="1"/>
           </p:cNvPicPr>
@@ -3300,8 +3305,8 @@
         </p:blipFill>
         <p:spPr>
           <a:xfrm>
-            <a:off x="6035040" y="1645920"/>
-            <a:ext cx="2743200" cy="2743200"/>
+            <a:off x="5943600" y="1645920"/>
+            <a:ext cx="2926080" cy="2926080"/>
           </a:xfrm>
           <a:prstGeom prst="rect">
             <a:avLst/>
@@ -3310,14 +3315,14 @@
       </p:pic>
       <p:sp>
         <p:nvSpPr>
-          <p:cNvPr id="5" name="TextBox 4"/>
-          <p:cNvSpPr txBox="1"/>
-          <p:nvPr/>
-        </p:nvSpPr>
-        <p:spPr>
-          <a:xfrm>
-            <a:off x="5852160" y="4663440"/>
-            <a:ext cx="3108960" cy="1097280"/>
+          <p:cNvPr id="6" name="TextBox 5"/>
+          <p:cNvSpPr txBox="1"/>
+          <p:nvPr/>
+        </p:nvSpPr>
+        <p:spPr>
+          <a:xfrm>
+            <a:off x="5760720" y="4754880"/>
+            <a:ext cx="3291840" cy="1097280"/>
           </a:xfrm>
           <a:prstGeom prst="rect">
             <a:avLst/>
@@ -3391,7 +3396,7 @@
               </a:defRPr>
             </a:pPr>
             <a:r>
-              <a:t>10. Halo Effect — Asch Personality Impression</a:t>
+              <a:t>10. Workplace Profile Evaluation</a:t>
             </a:r>
           </a:p>
         </p:txBody>
@@ -3404,8 +3409,8 @@
         </p:nvSpPr>
         <p:spPr>
           <a:xfrm>
-            <a:off x="548640" y="1188720"/>
-            <a:ext cx="5303520" cy="5029200"/>
+            <a:off x="548640" y="1005840"/>
+            <a:ext cx="8229600" cy="457200"/>
           </a:xfrm>
           <a:prstGeom prst="rect">
             <a:avLst/>
@@ -3419,68 +3424,60 @@
           <a:lstStyle/>
           <a:p>
             <a:pPr>
-              <a:defRPr sz="1300">
-                <a:solidFill>
-                  <a:srgbClr val="3C3C3C"/>
-                </a:solidFill>
-              </a:defRPr>
-            </a:pPr>
-            <a:r>
-              <a:t>📌 Scenario:</a:t>
+              <a:defRPr sz="1400" b="1">
+                <a:solidFill>
+                  <a:srgbClr val="FF6584"/>
+                </a:solidFill>
+              </a:defRPr>
+            </a:pPr>
+            <a:r>
+              <a:t>🧠 Cognitive Bias: Halo Effect &amp; Order Effect (Asch Model)</a:t>
+            </a:r>
+          </a:p>
+        </p:txBody>
+      </p:sp>
+      <p:sp>
+        <p:nvSpPr>
+          <p:cNvPr id="4" name="TextBox 3"/>
+          <p:cNvSpPr txBox="1"/>
+          <p:nvPr/>
+        </p:nvSpPr>
+        <p:spPr>
+          <a:xfrm>
+            <a:off x="548640" y="1645920"/>
+            <a:ext cx="5120640" cy="4572000"/>
+          </a:xfrm>
+          <a:prstGeom prst="rect">
+            <a:avLst/>
+          </a:prstGeom>
+          <a:noFill/>
+        </p:spPr>
+        <p:txBody>
+          <a:bodyPr wrap="square">
+            <a:spAutoFit/>
+          </a:bodyPr>
+          <a:lstStyle/>
+          <a:p>
+            <a:pPr>
+              <a:defRPr sz="1500">
+                <a:solidFill>
+                  <a:srgbClr val="323232"/>
+                </a:solidFill>
+              </a:defRPr>
+            </a:pPr>
+            <a:r>
+              <a:t>📌 Context &amp; Instructions:</a:t>
             </a:r>
             <a:br/>
             <a:r>
-              <a:t>Rating a colleague based on an ordered list of personality traits.</a:t>
-            </a:r>
-            <a:br/>
-          </a:p>
-          <a:p>
-            <a:pPr>
-              <a:defRPr sz="1200" b="1">
-                <a:solidFill>
-                  <a:srgbClr val="1E5AC8"/>
-                </a:solidFill>
-              </a:defRPr>
-            </a:pPr>
-            <a:r>
-              <a:t>🅰️ Gruppo A / Group A:</a:t>
-            </a:r>
-            <a:br/>
-            <a:r>
-              <a:t>Alan: Intelligent, industrious, impulsive, critical, stubborn, envious.</a:t>
-            </a:r>
-            <a:br/>
-            <a:r>
-              <a:t>Rate Alan as a coworker (1-10).</a:t>
-            </a:r>
-            <a:br/>
-          </a:p>
-          <a:p>
-            <a:pPr>
-              <a:defRPr sz="1200" b="1">
-                <a:solidFill>
-                  <a:srgbClr val="C8325A"/>
-                </a:solidFill>
-              </a:defRPr>
-            </a:pPr>
-            <a:r>
-              <a:t>🅱️ Gruppo B / Group B:</a:t>
-            </a:r>
-            <a:br/>
-            <a:r>
-              <a:t>Ben: Envious, stubborn, critical, impulsive, industrious, intelligent.</a:t>
-            </a:r>
-            <a:br/>
-            <a:r>
-              <a:t>Rate Ben as a coworker (1-10).</a:t>
-            </a:r>
-            <a:br/>
+              <a:t>Scan the QR code to read the personality description of a colleague provided by his coworkers and rate your overall impression of him.</a:t>
+            </a:r>
           </a:p>
         </p:txBody>
       </p:sp>
       <p:pic>
         <p:nvPicPr>
-          <p:cNvPr id="4" name="Picture 3" descr="Effetto_Alone_EN.png"/>
+          <p:cNvPr id="5" name="Picture 4" descr="Effetto_Alone_EN.png"/>
           <p:cNvPicPr>
             <a:picLocks noChangeAspect="1"/>
           </p:cNvPicPr>
@@ -3494,8 +3491,8 @@
         </p:blipFill>
         <p:spPr>
           <a:xfrm>
-            <a:off x="6035040" y="1645920"/>
-            <a:ext cx="2743200" cy="2743200"/>
+            <a:off x="5943600" y="1645920"/>
+            <a:ext cx="2926080" cy="2926080"/>
           </a:xfrm>
           <a:prstGeom prst="rect">
             <a:avLst/>
@@ -3504,14 +3501,14 @@
       </p:pic>
       <p:sp>
         <p:nvSpPr>
-          <p:cNvPr id="5" name="TextBox 4"/>
-          <p:cNvSpPr txBox="1"/>
-          <p:nvPr/>
-        </p:nvSpPr>
-        <p:spPr>
-          <a:xfrm>
-            <a:off x="5852160" y="4663440"/>
-            <a:ext cx="3108960" cy="1097280"/>
+          <p:cNvPr id="6" name="TextBox 5"/>
+          <p:cNvSpPr txBox="1"/>
+          <p:nvPr/>
+        </p:nvSpPr>
+        <p:spPr>
+          <a:xfrm>
+            <a:off x="5760720" y="4754880"/>
+            <a:ext cx="3291840" cy="1097280"/>
           </a:xfrm>
           <a:prstGeom prst="rect">
             <a:avLst/>
@@ -3585,7 +3582,7 @@
               </a:defRPr>
             </a:pPr>
             <a:r>
-              <a:t>11. Endowment Effect — Thaler's Mug</a:t>
+              <a:t>11. The University Mug Market (Thaler)</a:t>
             </a:r>
           </a:p>
         </p:txBody>
@@ -3598,8 +3595,8 @@
         </p:nvSpPr>
         <p:spPr>
           <a:xfrm>
-            <a:off x="548640" y="1188720"/>
-            <a:ext cx="5303520" cy="5029200"/>
+            <a:off x="548640" y="1005840"/>
+            <a:ext cx="8229600" cy="457200"/>
           </a:xfrm>
           <a:prstGeom prst="rect">
             <a:avLst/>
@@ -3613,68 +3610,65 @@
           <a:lstStyle/>
           <a:p>
             <a:pPr>
-              <a:defRPr sz="1300">
-                <a:solidFill>
-                  <a:srgbClr val="3C3C3C"/>
-                </a:solidFill>
-              </a:defRPr>
-            </a:pPr>
-            <a:r>
-              <a:t>📌 Scenario:</a:t>
+              <a:defRPr sz="1400" b="1">
+                <a:solidFill>
+                  <a:srgbClr val="FF6584"/>
+                </a:solidFill>
+              </a:defRPr>
+            </a:pPr>
+            <a:r>
+              <a:t>🧠 Cognitive Bias: Endowment Effect</a:t>
+            </a:r>
+          </a:p>
+        </p:txBody>
+      </p:sp>
+      <p:sp>
+        <p:nvSpPr>
+          <p:cNvPr id="4" name="TextBox 3"/>
+          <p:cNvSpPr txBox="1"/>
+          <p:nvPr/>
+        </p:nvSpPr>
+        <p:spPr>
+          <a:xfrm>
+            <a:off x="548640" y="1645920"/>
+            <a:ext cx="5120640" cy="4572000"/>
+          </a:xfrm>
+          <a:prstGeom prst="rect">
+            <a:avLst/>
+          </a:prstGeom>
+          <a:noFill/>
+        </p:spPr>
+        <p:txBody>
+          <a:bodyPr wrap="square">
+            <a:spAutoFit/>
+          </a:bodyPr>
+          <a:lstStyle/>
+          <a:p>
+            <a:pPr>
+              <a:defRPr sz="1500">
+                <a:solidFill>
+                  <a:srgbClr val="323232"/>
+                </a:solidFill>
+              </a:defRPr>
+            </a:pPr>
+            <a:r>
+              <a:t>📌 Context &amp; Instructions:</a:t>
             </a:r>
             <a:br/>
             <a:r>
-              <a:t>Trading market for an official university mug.</a:t>
+              <a:t>Participate in the market simulation for an official university mug.</a:t>
             </a:r>
             <a:br/>
-          </a:p>
-          <a:p>
-            <a:pPr>
-              <a:defRPr sz="1200" b="1">
-                <a:solidFill>
-                  <a:srgbClr val="1E5AC8"/>
-                </a:solidFill>
-              </a:defRPr>
-            </a:pPr>
-            <a:r>
-              <a:t>🅰️ Gruppo A / Group A:</a:t>
-            </a:r>
             <a:br/>
             <a:r>
-              <a:t>Sellers: You were GIVEN the mug.</a:t>
-            </a:r>
-            <a:br/>
-            <a:r>
-              <a:t>What is the minimum price (€) you will sell it for?</a:t>
-            </a:r>
-            <a:br/>
-          </a:p>
-          <a:p>
-            <a:pPr>
-              <a:defRPr sz="1200" b="1">
-                <a:solidFill>
-                  <a:srgbClr val="C8325A"/>
-                </a:solidFill>
-              </a:defRPr>
-            </a:pPr>
-            <a:r>
-              <a:t>🅱️ Gruppo B / Group B:</a:t>
-            </a:r>
-            <a:br/>
-            <a:r>
-              <a:t>Buyers: A classmate has the mug.</a:t>
-            </a:r>
-            <a:br/>
-            <a:r>
-              <a:t>What is the maximum price (€) you are willing to pay?</a:t>
-            </a:r>
-            <a:br/>
+              <a:t>Scan the QR code with your smartphone to discover your role and submit your price.</a:t>
+            </a:r>
           </a:p>
         </p:txBody>
       </p:sp>
       <p:pic>
         <p:nvPicPr>
-          <p:cNvPr id="4" name="Picture 3" descr="Effetto_Dote_Tazza_EN.png"/>
+          <p:cNvPr id="5" name="Picture 4" descr="Effetto_Dote_Tazza_EN.png"/>
           <p:cNvPicPr>
             <a:picLocks noChangeAspect="1"/>
           </p:cNvPicPr>
@@ -3688,8 +3682,8 @@
         </p:blipFill>
         <p:spPr>
           <a:xfrm>
-            <a:off x="6035040" y="1645920"/>
-            <a:ext cx="2743200" cy="2743200"/>
+            <a:off x="5943600" y="1645920"/>
+            <a:ext cx="2926080" cy="2926080"/>
           </a:xfrm>
           <a:prstGeom prst="rect">
             <a:avLst/>
@@ -3698,14 +3692,14 @@
       </p:pic>
       <p:sp>
         <p:nvSpPr>
-          <p:cNvPr id="5" name="TextBox 4"/>
-          <p:cNvSpPr txBox="1"/>
-          <p:nvPr/>
-        </p:nvSpPr>
-        <p:spPr>
-          <a:xfrm>
-            <a:off x="5852160" y="4663440"/>
-            <a:ext cx="3108960" cy="1097280"/>
+          <p:cNvPr id="6" name="TextBox 5"/>
+          <p:cNvSpPr txBox="1"/>
+          <p:nvPr/>
+        </p:nvSpPr>
+        <p:spPr>
+          <a:xfrm>
+            <a:off x="5760720" y="4754880"/>
+            <a:ext cx="3291840" cy="1097280"/>
           </a:xfrm>
           <a:prstGeom prst="rect">
             <a:avLst/>
@@ -3779,7 +3773,7 @@
               </a:defRPr>
             </a:pPr>
             <a:r>
-              <a:t>12. Endowment Effect — AI Software License</a:t>
+              <a:t>12. AI Diagnostic Software License Market</a:t>
             </a:r>
           </a:p>
         </p:txBody>
@@ -3792,8 +3786,8 @@
         </p:nvSpPr>
         <p:spPr>
           <a:xfrm>
-            <a:off x="548640" y="1188720"/>
-            <a:ext cx="5303520" cy="5029200"/>
+            <a:off x="548640" y="1005840"/>
+            <a:ext cx="8229600" cy="457200"/>
           </a:xfrm>
           <a:prstGeom prst="rect">
             <a:avLst/>
@@ -3807,68 +3801,65 @@
           <a:lstStyle/>
           <a:p>
             <a:pPr>
-              <a:defRPr sz="1300">
-                <a:solidFill>
-                  <a:srgbClr val="3C3C3C"/>
-                </a:solidFill>
-              </a:defRPr>
-            </a:pPr>
-            <a:r>
-              <a:t>📌 Scenario:</a:t>
+              <a:defRPr sz="1400" b="1">
+                <a:solidFill>
+                  <a:srgbClr val="FF6584"/>
+                </a:solidFill>
+              </a:defRPr>
+            </a:pPr>
+            <a:r>
+              <a:t>🧠 Cognitive Bias: Endowment Effect in Digital Assets</a:t>
+            </a:r>
+          </a:p>
+        </p:txBody>
+      </p:sp>
+      <p:sp>
+        <p:nvSpPr>
+          <p:cNvPr id="4" name="TextBox 3"/>
+          <p:cNvSpPr txBox="1"/>
+          <p:nvPr/>
+        </p:nvSpPr>
+        <p:spPr>
+          <a:xfrm>
+            <a:off x="548640" y="1645920"/>
+            <a:ext cx="5120640" cy="4572000"/>
+          </a:xfrm>
+          <a:prstGeom prst="rect">
+            <a:avLst/>
+          </a:prstGeom>
+          <a:noFill/>
+        </p:spPr>
+        <p:txBody>
+          <a:bodyPr wrap="square">
+            <a:spAutoFit/>
+          </a:bodyPr>
+          <a:lstStyle/>
+          <a:p>
+            <a:pPr>
+              <a:defRPr sz="1500">
+                <a:solidFill>
+                  <a:srgbClr val="323232"/>
+                </a:solidFill>
+              </a:defRPr>
+            </a:pPr>
+            <a:r>
+              <a:t>📌 Context &amp; Instructions:</a:t>
             </a:r>
             <a:br/>
             <a:r>
-              <a:t>Market for a rare AI diagnostic software license.</a:t>
+              <a:t>Participate in the market negotiation for a rare AI diagnostic software license.</a:t>
             </a:r>
             <a:br/>
-          </a:p>
-          <a:p>
-            <a:pPr>
-              <a:defRPr sz="1200" b="1">
-                <a:solidFill>
-                  <a:srgbClr val="1E5AC8"/>
-                </a:solidFill>
-              </a:defRPr>
-            </a:pPr>
-            <a:r>
-              <a:t>🅰️ Gruppo A / Group A:</a:t>
-            </a:r>
             <a:br/>
             <a:r>
-              <a:t>Owner: You were GIFTED the license.</a:t>
-            </a:r>
-            <a:br/>
-            <a:r>
-              <a:t>Minimum price (€) demanded to sell it.</a:t>
-            </a:r>
-            <a:br/>
-          </a:p>
-          <a:p>
-            <a:pPr>
-              <a:defRPr sz="1200" b="1">
-                <a:solidFill>
-                  <a:srgbClr val="C8325A"/>
-                </a:solidFill>
-              </a:defRPr>
-            </a:pPr>
-            <a:r>
-              <a:t>🅱️ Gruppo B / Group B:</a:t>
-            </a:r>
-            <a:br/>
-            <a:r>
-              <a:t>Buyer: A hospital is selling the license.</a:t>
-            </a:r>
-            <a:br/>
-            <a:r>
-              <a:t>Maximum price (€) willing to pay.</a:t>
-            </a:r>
-            <a:br/>
+              <a:t>Scan the QR code to discover your negotiation role and enter your valuation in Euros (€).</a:t>
+            </a:r>
           </a:p>
         </p:txBody>
       </p:sp>
       <p:pic>
         <p:nvPicPr>
-          <p:cNvPr id="4" name="Picture 3" descr="Effetto_Dote_AI_EN.png"/>
+          <p:cNvPr id="5" name="Picture 4" descr="Effetto_Dote_AI_EN.png"/>
           <p:cNvPicPr>
             <a:picLocks noChangeAspect="1"/>
           </p:cNvPicPr>
@@ -3882,8 +3873,8 @@
         </p:blipFill>
         <p:spPr>
           <a:xfrm>
-            <a:off x="6035040" y="1645920"/>
-            <a:ext cx="2743200" cy="2743200"/>
+            <a:off x="5943600" y="1645920"/>
+            <a:ext cx="2926080" cy="2926080"/>
           </a:xfrm>
           <a:prstGeom prst="rect">
             <a:avLst/>
@@ -3892,14 +3883,14 @@
       </p:pic>
       <p:sp>
         <p:nvSpPr>
-          <p:cNvPr id="5" name="TextBox 4"/>
-          <p:cNvSpPr txBox="1"/>
-          <p:nvPr/>
-        </p:nvSpPr>
-        <p:spPr>
-          <a:xfrm>
-            <a:off x="5852160" y="4663440"/>
-            <a:ext cx="3108960" cy="1097280"/>
+          <p:cNvPr id="6" name="TextBox 5"/>
+          <p:cNvSpPr txBox="1"/>
+          <p:nvPr/>
+        </p:nvSpPr>
+        <p:spPr>
+          <a:xfrm>
+            <a:off x="5760720" y="4754880"/>
+            <a:ext cx="3291840" cy="1097280"/>
           </a:xfrm>
           <a:prstGeom prst="rect">
             <a:avLst/>
@@ -3973,7 +3964,7 @@
               </a:defRPr>
             </a:pPr>
             <a:r>
-              <a:t>13. Sunk Cost Fallacy — Theater Ticket</a:t>
+              <a:t>13. The Theater Ticket Scenario (Kahneman)</a:t>
             </a:r>
           </a:p>
         </p:txBody>
@@ -3986,8 +3977,8 @@
         </p:nvSpPr>
         <p:spPr>
           <a:xfrm>
-            <a:off x="548640" y="1188720"/>
-            <a:ext cx="5303520" cy="5029200"/>
+            <a:off x="548640" y="1005840"/>
+            <a:ext cx="8229600" cy="457200"/>
           </a:xfrm>
           <a:prstGeom prst="rect">
             <a:avLst/>
@@ -4001,76 +3992,65 @@
           <a:lstStyle/>
           <a:p>
             <a:pPr>
-              <a:defRPr sz="1300">
-                <a:solidFill>
-                  <a:srgbClr val="3C3C3C"/>
-                </a:solidFill>
-              </a:defRPr>
-            </a:pPr>
-            <a:r>
-              <a:t>📌 Scenario:</a:t>
+              <a:defRPr sz="1400" b="1">
+                <a:solidFill>
+                  <a:srgbClr val="FF6584"/>
+                </a:solidFill>
+              </a:defRPr>
+            </a:pPr>
+            <a:r>
+              <a:t>🧠 Cognitive Bias: Sunk Cost Fallacy</a:t>
+            </a:r>
+          </a:p>
+        </p:txBody>
+      </p:sp>
+      <p:sp>
+        <p:nvSpPr>
+          <p:cNvPr id="4" name="TextBox 3"/>
+          <p:cNvSpPr txBox="1"/>
+          <p:nvPr/>
+        </p:nvSpPr>
+        <p:spPr>
+          <a:xfrm>
+            <a:off x="548640" y="1645920"/>
+            <a:ext cx="5120640" cy="4572000"/>
+          </a:xfrm>
+          <a:prstGeom prst="rect">
+            <a:avLst/>
+          </a:prstGeom>
+          <a:noFill/>
+        </p:spPr>
+        <p:txBody>
+          <a:bodyPr wrap="square">
+            <a:spAutoFit/>
+          </a:bodyPr>
+          <a:lstStyle/>
+          <a:p>
+            <a:pPr>
+              <a:defRPr sz="1500">
+                <a:solidFill>
+                  <a:srgbClr val="323232"/>
+                </a:solidFill>
+              </a:defRPr>
+            </a:pPr>
+            <a:r>
+              <a:t>📌 Context &amp; Instructions:</a:t>
             </a:r>
             <a:br/>
             <a:r>
-              <a:t>A severe snowstorm hits on the night of the theater performance.</a:t>
+              <a:t>It is the evening of a theater show you really want to see, but a severe snowstorm suddenly strikes.</a:t>
             </a:r>
             <a:br/>
-          </a:p>
-          <a:p>
-            <a:pPr>
-              <a:defRPr sz="1200" b="1">
-                <a:solidFill>
-                  <a:srgbClr val="1E5AC8"/>
-                </a:solidFill>
-              </a:defRPr>
-            </a:pPr>
-            <a:r>
-              <a:t>🅰️ Gruppo A / Group A:</a:t>
-            </a:r>
             <a:br/>
             <a:r>
-              <a:t>Ticket bought for €50.</a:t>
-            </a:r>
-            <a:br/>
-            <a:r>
-              <a:t>A) Go to the theater anyway</a:t>
-            </a:r>
-            <a:br/>
-            <a:r>
-              <a:t>B) Stay home warm</a:t>
-            </a:r>
-            <a:br/>
-          </a:p>
-          <a:p>
-            <a:pPr>
-              <a:defRPr sz="1200" b="1">
-                <a:solidFill>
-                  <a:srgbClr val="C8325A"/>
-                </a:solidFill>
-              </a:defRPr>
-            </a:pPr>
-            <a:r>
-              <a:t>🅱️ Gruppo B / Group B:</a:t>
-            </a:r>
-            <a:br/>
-            <a:r>
-              <a:t>Ticket received for free (€0).</a:t>
-            </a:r>
-            <a:br/>
-            <a:r>
-              <a:t>A) Go to the theater anyway</a:t>
-            </a:r>
-            <a:br/>
-            <a:r>
-              <a:t>B) Stay home warm</a:t>
-            </a:r>
-            <a:br/>
+              <a:t>Scan the QR code from your smartphone to indicate what you decide to do.</a:t>
+            </a:r>
           </a:p>
         </p:txBody>
       </p:sp>
       <p:pic>
         <p:nvPicPr>
-          <p:cNvPr id="4" name="Picture 3" descr="Costi_Sommersi_Teatro_EN.png"/>
+          <p:cNvPr id="5" name="Picture 4" descr="Costi_Sommersi_Teatro_EN.png"/>
           <p:cNvPicPr>
             <a:picLocks noChangeAspect="1"/>
           </p:cNvPicPr>
@@ -4084,8 +4064,8 @@
         </p:blipFill>
         <p:spPr>
           <a:xfrm>
-            <a:off x="6035040" y="1645920"/>
-            <a:ext cx="2743200" cy="2743200"/>
+            <a:off x="5943600" y="1645920"/>
+            <a:ext cx="2926080" cy="2926080"/>
           </a:xfrm>
           <a:prstGeom prst="rect">
             <a:avLst/>
@@ -4094,14 +4074,14 @@
       </p:pic>
       <p:sp>
         <p:nvSpPr>
-          <p:cNvPr id="5" name="TextBox 4"/>
-          <p:cNvSpPr txBox="1"/>
-          <p:nvPr/>
-        </p:nvSpPr>
-        <p:spPr>
-          <a:xfrm>
-            <a:off x="5852160" y="4663440"/>
-            <a:ext cx="3108960" cy="1097280"/>
+          <p:cNvPr id="6" name="TextBox 5"/>
+          <p:cNvSpPr txBox="1"/>
+          <p:nvPr/>
+        </p:nvSpPr>
+        <p:spPr>
+          <a:xfrm>
+            <a:off x="5760720" y="4754880"/>
+            <a:ext cx="3291840" cy="1097280"/>
           </a:xfrm>
           <a:prstGeom prst="rect">
             <a:avLst/>
@@ -4175,7 +4155,7 @@
               </a:defRPr>
             </a:pPr>
             <a:r>
-              <a:t>14. Sunk Cost Fallacy — AI Research Project</a:t>
+              <a:t>14. AI Research Project Management</a:t>
             </a:r>
           </a:p>
         </p:txBody>
@@ -4188,8 +4168,8 @@
         </p:nvSpPr>
         <p:spPr>
           <a:xfrm>
-            <a:off x="548640" y="1188720"/>
-            <a:ext cx="5303520" cy="5029200"/>
+            <a:off x="548640" y="1005840"/>
+            <a:ext cx="8229600" cy="457200"/>
           </a:xfrm>
           <a:prstGeom prst="rect">
             <a:avLst/>
@@ -4203,76 +4183,65 @@
           <a:lstStyle/>
           <a:p>
             <a:pPr>
-              <a:defRPr sz="1300">
-                <a:solidFill>
-                  <a:srgbClr val="3C3C3C"/>
-                </a:solidFill>
-              </a:defRPr>
-            </a:pPr>
-            <a:r>
-              <a:t>📌 Scenario:</a:t>
+              <a:defRPr sz="1400" b="1">
+                <a:solidFill>
+                  <a:srgbClr val="FF6584"/>
+                </a:solidFill>
+              </a:defRPr>
+            </a:pPr>
+            <a:r>
+              <a:t>🧠 Cognitive Bias: Sunk Cost Fallacy in R&amp;D</a:t>
+            </a:r>
+          </a:p>
+        </p:txBody>
+      </p:sp>
+      <p:sp>
+        <p:nvSpPr>
+          <p:cNvPr id="4" name="TextBox 3"/>
+          <p:cNvSpPr txBox="1"/>
+          <p:nvPr/>
+        </p:nvSpPr>
+        <p:spPr>
+          <a:xfrm>
+            <a:off x="548640" y="1645920"/>
+            <a:ext cx="5120640" cy="4572000"/>
+          </a:xfrm>
+          <a:prstGeom prst="rect">
+            <a:avLst/>
+          </a:prstGeom>
+          <a:noFill/>
+        </p:spPr>
+        <p:txBody>
+          <a:bodyPr wrap="square">
+            <a:spAutoFit/>
+          </a:bodyPr>
+          <a:lstStyle/>
+          <a:p>
+            <a:pPr>
+              <a:defRPr sz="1500">
+                <a:solidFill>
+                  <a:srgbClr val="323232"/>
+                </a:solidFill>
+              </a:defRPr>
+            </a:pPr>
+            <a:r>
+              <a:t>📌 Context &amp; Instructions:</a:t>
             </a:r>
             <a:br/>
             <a:r>
-              <a:t>Google releases a free superior algorithm while your team works on one.</a:t>
+              <a:t>You lead an AI research team working on a new diagnostic algorithm. During development, Google releases a free superior algorithm.</a:t>
             </a:r>
             <a:br/>
-          </a:p>
-          <a:p>
-            <a:pPr>
-              <a:defRPr sz="1200" b="1">
-                <a:solidFill>
-                  <a:srgbClr val="1E5AC8"/>
-                </a:solidFill>
-              </a:defRPr>
-            </a:pPr>
-            <a:r>
-              <a:t>🅰️ Gruppo A / Group A:</a:t>
-            </a:r>
             <a:br/>
             <a:r>
-              <a:t>Project started TODAY (0 years invested).</a:t>
-            </a:r>
-            <a:br/>
-            <a:r>
-              <a:t>A) Continue developing mine</a:t>
-            </a:r>
-            <a:br/>
-            <a:r>
-              <a:t>B) Abandon my project</a:t>
-            </a:r>
-            <a:br/>
-          </a:p>
-          <a:p>
-            <a:pPr>
-              <a:defRPr sz="1200" b="1">
-                <a:solidFill>
-                  <a:srgbClr val="C8325A"/>
-                </a:solidFill>
-              </a:defRPr>
-            </a:pPr>
-            <a:r>
-              <a:t>🅱️ Gruppo B / Group B:</a:t>
-            </a:r>
-            <a:br/>
-            <a:r>
-              <a:t>Worked for 4 YEARS on the algorithm (90% done).</a:t>
-            </a:r>
-            <a:br/>
-            <a:r>
-              <a:t>A) Continue developing mine</a:t>
-            </a:r>
-            <a:br/>
-            <a:r>
-              <a:t>B) Abandon my project</a:t>
-            </a:r>
-            <a:br/>
+              <a:t>Scan the QR code to decide the future of your project.</a:t>
+            </a:r>
           </a:p>
         </p:txBody>
       </p:sp>
       <p:pic>
         <p:nvPicPr>
-          <p:cNvPr id="4" name="Picture 3" descr="Costi_Sommersi_AI_EN.png"/>
+          <p:cNvPr id="5" name="Picture 4" descr="Costi_Sommersi_AI_EN.png"/>
           <p:cNvPicPr>
             <a:picLocks noChangeAspect="1"/>
           </p:cNvPicPr>
@@ -4286,8 +4255,8 @@
         </p:blipFill>
         <p:spPr>
           <a:xfrm>
-            <a:off x="6035040" y="1645920"/>
-            <a:ext cx="2743200" cy="2743200"/>
+            <a:off x="5943600" y="1645920"/>
+            <a:ext cx="2926080" cy="2926080"/>
           </a:xfrm>
           <a:prstGeom prst="rect">
             <a:avLst/>
@@ -4296,14 +4265,14 @@
       </p:pic>
       <p:sp>
         <p:nvSpPr>
-          <p:cNvPr id="5" name="TextBox 4"/>
-          <p:cNvSpPr txBox="1"/>
-          <p:nvPr/>
-        </p:nvSpPr>
-        <p:spPr>
-          <a:xfrm>
-            <a:off x="5852160" y="4663440"/>
-            <a:ext cx="3108960" cy="1097280"/>
+          <p:cNvPr id="6" name="TextBox 5"/>
+          <p:cNvSpPr txBox="1"/>
+          <p:nvPr/>
+        </p:nvSpPr>
+        <p:spPr>
+          <a:xfrm>
+            <a:off x="5760720" y="4754880"/>
+            <a:ext cx="3291840" cy="1097280"/>
           </a:xfrm>
           <a:prstGeom prst="rect">
             <a:avLst/>
@@ -4377,7 +4346,7 @@
               </a:defRPr>
             </a:pPr>
             <a:r>
-              <a:t>15. Default Effect — Organ Donation</a:t>
+              <a:t>15. Hospital Employee Onboarding Form</a:t>
             </a:r>
           </a:p>
         </p:txBody>
@@ -4390,8 +4359,8 @@
         </p:nvSpPr>
         <p:spPr>
           <a:xfrm>
-            <a:off x="548640" y="1188720"/>
-            <a:ext cx="5303520" cy="5029200"/>
+            <a:off x="548640" y="1005840"/>
+            <a:ext cx="8229600" cy="457200"/>
           </a:xfrm>
           <a:prstGeom prst="rect">
             <a:avLst/>
@@ -4405,60 +4374,65 @@
           <a:lstStyle/>
           <a:p>
             <a:pPr>
-              <a:defRPr sz="1300">
-                <a:solidFill>
-                  <a:srgbClr val="3C3C3C"/>
-                </a:solidFill>
-              </a:defRPr>
-            </a:pPr>
-            <a:r>
-              <a:t>📌 Scenario:</a:t>
+              <a:defRPr sz="1400" b="1">
+                <a:solidFill>
+                  <a:srgbClr val="FF6584"/>
+                </a:solidFill>
+              </a:defRPr>
+            </a:pPr>
+            <a:r>
+              <a:t>🧠 Cognitive Bias: Default Effect &amp; Choice Architecture (Nudge)</a:t>
+            </a:r>
+          </a:p>
+        </p:txBody>
+      </p:sp>
+      <p:sp>
+        <p:nvSpPr>
+          <p:cNvPr id="4" name="TextBox 3"/>
+          <p:cNvSpPr txBox="1"/>
+          <p:nvPr/>
+        </p:nvSpPr>
+        <p:spPr>
+          <a:xfrm>
+            <a:off x="548640" y="1645920"/>
+            <a:ext cx="5120640" cy="4572000"/>
+          </a:xfrm>
+          <a:prstGeom prst="rect">
+            <a:avLst/>
+          </a:prstGeom>
+          <a:noFill/>
+        </p:spPr>
+        <p:txBody>
+          <a:bodyPr wrap="square">
+            <a:spAutoFit/>
+          </a:bodyPr>
+          <a:lstStyle/>
+          <a:p>
+            <a:pPr>
+              <a:defRPr sz="1500">
+                <a:solidFill>
+                  <a:srgbClr val="323232"/>
+                </a:solidFill>
+              </a:defRPr>
+            </a:pPr>
+            <a:r>
+              <a:t>📌 Context &amp; Instructions:</a:t>
             </a:r>
             <a:br/>
             <a:r>
-              <a:t>Signing hospital employee onboarding consent form.</a:t>
+              <a:t>Imagine completing your onboarding consent forms as a new hospital employee.</a:t>
             </a:r>
             <a:br/>
-          </a:p>
-          <a:p>
-            <a:pPr>
-              <a:defRPr sz="1200" b="1">
-                <a:solidFill>
-                  <a:srgbClr val="1E5AC8"/>
-                </a:solidFill>
-              </a:defRPr>
-            </a:pPr>
-            <a:r>
-              <a:t>🅰️ Gruppo A / Group A:</a:t>
-            </a:r>
             <a:br/>
             <a:r>
-              <a:t>Opt-IN Form: [ ] Check the box if you WANT to become an organ donor.</a:t>
-            </a:r>
-            <a:br/>
-          </a:p>
-          <a:p>
-            <a:pPr>
-              <a:defRPr sz="1200" b="1">
-                <a:solidFill>
-                  <a:srgbClr val="C8325A"/>
-                </a:solidFill>
-              </a:defRPr>
-            </a:pPr>
-            <a:r>
-              <a:t>🅱️ Gruppo B / Group B:</a:t>
-            </a:r>
-            <a:br/>
-            <a:r>
-              <a:t>Opt-OUT Form: [v] Check the box if you DO NOT WANT to become an organ donor.</a:t>
-            </a:r>
-            <a:br/>
+              <a:t>Scan the QR code with your smartphone to make your choice on the form.</a:t>
+            </a:r>
           </a:p>
         </p:txBody>
       </p:sp>
       <p:pic>
         <p:nvPicPr>
-          <p:cNvPr id="4" name="Picture 3" descr="Effetto_Default_EN.png"/>
+          <p:cNvPr id="5" name="Picture 4" descr="Effetto_Default_EN.png"/>
           <p:cNvPicPr>
             <a:picLocks noChangeAspect="1"/>
           </p:cNvPicPr>
@@ -4472,8 +4446,8 @@
         </p:blipFill>
         <p:spPr>
           <a:xfrm>
-            <a:off x="6035040" y="1645920"/>
-            <a:ext cx="2743200" cy="2743200"/>
+            <a:off x="5943600" y="1645920"/>
+            <a:ext cx="2926080" cy="2926080"/>
           </a:xfrm>
           <a:prstGeom prst="rect">
             <a:avLst/>
@@ -4482,14 +4456,14 @@
       </p:pic>
       <p:sp>
         <p:nvSpPr>
-          <p:cNvPr id="5" name="TextBox 4"/>
-          <p:cNvSpPr txBox="1"/>
-          <p:nvPr/>
-        </p:nvSpPr>
-        <p:spPr>
-          <a:xfrm>
-            <a:off x="5852160" y="4663440"/>
-            <a:ext cx="3108960" cy="1097280"/>
+          <p:cNvPr id="6" name="TextBox 5"/>
+          <p:cNvSpPr txBox="1"/>
+          <p:nvPr/>
+        </p:nvSpPr>
+        <p:spPr>
+          <a:xfrm>
+            <a:off x="5760720" y="4754880"/>
+            <a:ext cx="3291840" cy="1097280"/>
           </a:xfrm>
           <a:prstGeom prst="rect">
             <a:avLst/>
@@ -4563,7 +4537,7 @@
               </a:defRPr>
             </a:pPr>
             <a:r>
-              <a:t>16. Associative Priming — Word Completion</a:t>
+              <a:t>16. Word Completion Test</a:t>
             </a:r>
           </a:p>
         </p:txBody>
@@ -4576,8 +4550,8 @@
         </p:nvSpPr>
         <p:spPr>
           <a:xfrm>
-            <a:off x="548640" y="1188720"/>
-            <a:ext cx="5303520" cy="5029200"/>
+            <a:off x="548640" y="1005840"/>
+            <a:ext cx="8229600" cy="457200"/>
           </a:xfrm>
           <a:prstGeom prst="rect">
             <a:avLst/>
@@ -4591,68 +4565,60 @@
           <a:lstStyle/>
           <a:p>
             <a:pPr>
-              <a:defRPr sz="1300">
-                <a:solidFill>
-                  <a:srgbClr val="3C3C3C"/>
-                </a:solidFill>
-              </a:defRPr>
-            </a:pPr>
-            <a:r>
-              <a:t>📌 Scenario:</a:t>
+              <a:defRPr sz="1400" b="1">
+                <a:solidFill>
+                  <a:srgbClr val="FF6584"/>
+                </a:solidFill>
+              </a:defRPr>
+            </a:pPr>
+            <a:r>
+              <a:t>🧠 Cognitive Bias: Associative / Conceptual Priming</a:t>
+            </a:r>
+          </a:p>
+        </p:txBody>
+      </p:sp>
+      <p:sp>
+        <p:nvSpPr>
+          <p:cNvPr id="4" name="TextBox 3"/>
+          <p:cNvSpPr txBox="1"/>
+          <p:nvPr/>
+        </p:nvSpPr>
+        <p:spPr>
+          <a:xfrm>
+            <a:off x="548640" y="1645920"/>
+            <a:ext cx="5120640" cy="4572000"/>
+          </a:xfrm>
+          <a:prstGeom prst="rect">
+            <a:avLst/>
+          </a:prstGeom>
+          <a:noFill/>
+        </p:spPr>
+        <p:txBody>
+          <a:bodyPr wrap="square">
+            <a:spAutoFit/>
+          </a:bodyPr>
+          <a:lstStyle/>
+          <a:p>
+            <a:pPr>
+              <a:defRPr sz="1500">
+                <a:solidFill>
+                  <a:srgbClr val="323232"/>
+                </a:solidFill>
+              </a:defRPr>
+            </a:pPr>
+            <a:r>
+              <a:t>📌 Context &amp; Instructions:</a:t>
             </a:r>
             <a:br/>
             <a:r>
-              <a:t>Effect of semantic priming on completing the word S O _ P.</a:t>
-            </a:r>
-            <a:br/>
-          </a:p>
-          <a:p>
-            <a:pPr>
-              <a:defRPr sz="1200" b="1">
-                <a:solidFill>
-                  <a:srgbClr val="1E5AC8"/>
-                </a:solidFill>
-              </a:defRPr>
-            </a:pPr>
-            <a:r>
-              <a:t>🅰️ Gruppo A / Group A:</a:t>
-            </a:r>
-            <a:br/>
-            <a:r>
-              <a:t>Quick reading: FORK, LUNCH, HUNGER.</a:t>
-            </a:r>
-            <a:br/>
-            <a:r>
-              <a:t>Complete the word: S O _ P</a:t>
-            </a:r>
-            <a:br/>
-          </a:p>
-          <a:p>
-            <a:pPr>
-              <a:defRPr sz="1200" b="1">
-                <a:solidFill>
-                  <a:srgbClr val="C8325A"/>
-                </a:solidFill>
-              </a:defRPr>
-            </a:pPr>
-            <a:r>
-              <a:t>🅱️ Gruppo B / Group B:</a:t>
-            </a:r>
-            <a:br/>
-            <a:r>
-              <a:t>Quick reading: SHOWER, FOAM, CLEAN.</a:t>
-            </a:r>
-            <a:br/>
-            <a:r>
-              <a:t>Complete the word: S O _ P</a:t>
-            </a:r>
-            <a:br/>
+              <a:t>Scan the QR code to quickly read the trigger words that will appear on your screen and complete the missing word as fast as possible.</a:t>
+            </a:r>
           </a:p>
         </p:txBody>
       </p:sp>
       <p:pic>
         <p:nvPicPr>
-          <p:cNvPr id="4" name="Picture 3" descr="Priming_Associativo_EN.png"/>
+          <p:cNvPr id="5" name="Picture 4" descr="Priming_Associativo_EN.png"/>
           <p:cNvPicPr>
             <a:picLocks noChangeAspect="1"/>
           </p:cNvPicPr>
@@ -4666,8 +4632,8 @@
         </p:blipFill>
         <p:spPr>
           <a:xfrm>
-            <a:off x="6035040" y="1645920"/>
-            <a:ext cx="2743200" cy="2743200"/>
+            <a:off x="5943600" y="1645920"/>
+            <a:ext cx="2926080" cy="2926080"/>
           </a:xfrm>
           <a:prstGeom prst="rect">
             <a:avLst/>
@@ -4676,14 +4642,14 @@
       </p:pic>
       <p:sp>
         <p:nvSpPr>
-          <p:cNvPr id="5" name="TextBox 4"/>
-          <p:cNvSpPr txBox="1"/>
-          <p:nvPr/>
-        </p:nvSpPr>
-        <p:spPr>
-          <a:xfrm>
-            <a:off x="5852160" y="4663440"/>
-            <a:ext cx="3108960" cy="1097280"/>
+          <p:cNvPr id="6" name="TextBox 5"/>
+          <p:cNvSpPr txBox="1"/>
+          <p:nvPr/>
+        </p:nvSpPr>
+        <p:spPr>
+          <a:xfrm>
+            <a:off x="5760720" y="4754880"/>
+            <a:ext cx="3291840" cy="1097280"/>
           </a:xfrm>
           <a:prstGeom prst="rect">
             <a:avLst/>
@@ -4757,7 +4723,7 @@
               </a:defRPr>
             </a:pPr>
             <a:r>
-              <a:t>17. Illusion of Superiority — Dunning-Kruger</a:t>
+              <a:t>17. Academic Ability Self-Assessment</a:t>
             </a:r>
           </a:p>
         </p:txBody>
@@ -4770,8 +4736,8 @@
         </p:nvSpPr>
         <p:spPr>
           <a:xfrm>
-            <a:off x="548640" y="1188720"/>
-            <a:ext cx="5303520" cy="5029200"/>
+            <a:off x="548640" y="1005840"/>
+            <a:ext cx="8229600" cy="457200"/>
           </a:xfrm>
           <a:prstGeom prst="rect">
             <a:avLst/>
@@ -4785,68 +4751,60 @@
           <a:lstStyle/>
           <a:p>
             <a:pPr>
-              <a:defRPr sz="1300">
-                <a:solidFill>
-                  <a:srgbClr val="3C3C3C"/>
-                </a:solidFill>
-              </a:defRPr>
-            </a:pPr>
-            <a:r>
-              <a:t>📌 Scenario:</a:t>
+              <a:defRPr sz="1400" b="1">
+                <a:solidFill>
+                  <a:srgbClr val="FF6584"/>
+                </a:solidFill>
+              </a:defRPr>
+            </a:pPr>
+            <a:r>
+              <a:t>🧠 Cognitive Bias: Illusion of Superiority &amp; Dunning-Kruger Effect</a:t>
+            </a:r>
+          </a:p>
+        </p:txBody>
+      </p:sp>
+      <p:sp>
+        <p:nvSpPr>
+          <p:cNvPr id="4" name="TextBox 3"/>
+          <p:cNvSpPr txBox="1"/>
+          <p:nvPr/>
+        </p:nvSpPr>
+        <p:spPr>
+          <a:xfrm>
+            <a:off x="548640" y="1645920"/>
+            <a:ext cx="5120640" cy="4572000"/>
+          </a:xfrm>
+          <a:prstGeom prst="rect">
+            <a:avLst/>
+          </a:prstGeom>
+          <a:noFill/>
+        </p:spPr>
+        <p:txBody>
+          <a:bodyPr wrap="square">
+            <a:spAutoFit/>
+          </a:bodyPr>
+          <a:lstStyle/>
+          <a:p>
+            <a:pPr>
+              <a:defRPr sz="1500">
+                <a:solidFill>
+                  <a:srgbClr val="323232"/>
+                </a:solidFill>
+              </a:defRPr>
+            </a:pPr>
+            <a:r>
+              <a:t>📌 Context &amp; Instructions:</a:t>
             </a:r>
             <a:br/>
             <a:r>
-              <a:t>Self-evaluation of personal academic ability.</a:t>
-            </a:r>
-            <a:br/>
-          </a:p>
-          <a:p>
-            <a:pPr>
-              <a:defRPr sz="1200" b="1">
-                <a:solidFill>
-                  <a:srgbClr val="1E5AC8"/>
-                </a:solidFill>
-              </a:defRPr>
-            </a:pPr>
-            <a:r>
-              <a:t>🅰️ Gruppo A / Group A:</a:t>
-            </a:r>
-            <a:br/>
-            <a:r>
-              <a:t>Do you consider your academic ability above class average?</a:t>
-            </a:r>
-            <a:br/>
-            <a:r>
-              <a:t>(Above average / Average / Below average)</a:t>
-            </a:r>
-            <a:br/>
-          </a:p>
-          <a:p>
-            <a:pPr>
-              <a:defRPr sz="1200" b="1">
-                <a:solidFill>
-                  <a:srgbClr val="C8325A"/>
-                </a:solidFill>
-              </a:defRPr>
-            </a:pPr>
-            <a:r>
-              <a:t>🅱️ Gruppo B / Group B:</a:t>
-            </a:r>
-            <a:br/>
-            <a:r>
-              <a:t>Do you consider your academic ability superior to Giorgio Parisi (Nobel)?</a:t>
-            </a:r>
-            <a:br/>
-            <a:r>
-              <a:t>(Above his / Equal to his / Below his)</a:t>
-            </a:r>
-            <a:br/>
+              <a:t>Scan the QR code with your smartphone to anonymously answer a self-evaluation question about your academic abilities.</a:t>
+            </a:r>
           </a:p>
         </p:txBody>
       </p:sp>
       <p:pic>
         <p:nvPicPr>
-          <p:cNvPr id="4" name="Picture 3" descr="Dunning_Kruger_EN.png"/>
+          <p:cNvPr id="5" name="Picture 4" descr="Dunning_Kruger_EN.png"/>
           <p:cNvPicPr>
             <a:picLocks noChangeAspect="1"/>
           </p:cNvPicPr>
@@ -4860,8 +4818,8 @@
         </p:blipFill>
         <p:spPr>
           <a:xfrm>
-            <a:off x="6035040" y="1645920"/>
-            <a:ext cx="2743200" cy="2743200"/>
+            <a:off x="5943600" y="1645920"/>
+            <a:ext cx="2926080" cy="2926080"/>
           </a:xfrm>
           <a:prstGeom prst="rect">
             <a:avLst/>
@@ -4870,14 +4828,14 @@
       </p:pic>
       <p:sp>
         <p:nvSpPr>
-          <p:cNvPr id="5" name="TextBox 4"/>
-          <p:cNvSpPr txBox="1"/>
-          <p:nvPr/>
-        </p:nvSpPr>
-        <p:spPr>
-          <a:xfrm>
-            <a:off x="5852160" y="4663440"/>
-            <a:ext cx="3108960" cy="1097280"/>
+          <p:cNvPr id="6" name="TextBox 5"/>
+          <p:cNvSpPr txBox="1"/>
+          <p:nvPr/>
+        </p:nvSpPr>
+        <p:spPr>
+          <a:xfrm>
+            <a:off x="5760720" y="4754880"/>
+            <a:ext cx="3291840" cy="1097280"/>
           </a:xfrm>
           <a:prstGeom prst="rect">
             <a:avLst/>
@@ -4951,7 +4909,7 @@
               </a:defRPr>
             </a:pPr>
             <a:r>
-              <a:t>18. WYSIATI — What You See Is All There Is</a:t>
+              <a:t>18. Court Trial Verdict Decision</a:t>
             </a:r>
           </a:p>
         </p:txBody>
@@ -4964,8 +4922,8 @@
         </p:nvSpPr>
         <p:spPr>
           <a:xfrm>
-            <a:off x="548640" y="1188720"/>
-            <a:ext cx="5303520" cy="5029200"/>
+            <a:off x="548640" y="1005840"/>
+            <a:ext cx="8229600" cy="457200"/>
           </a:xfrm>
           <a:prstGeom prst="rect">
             <a:avLst/>
@@ -4979,68 +4937,60 @@
           <a:lstStyle/>
           <a:p>
             <a:pPr>
-              <a:defRPr sz="1300">
-                <a:solidFill>
-                  <a:srgbClr val="3C3C3C"/>
-                </a:solidFill>
-              </a:defRPr>
-            </a:pPr>
-            <a:r>
-              <a:t>📌 Scenario:</a:t>
+              <a:defRPr sz="1400" b="1">
+                <a:solidFill>
+                  <a:srgbClr val="FF6584"/>
+                </a:solidFill>
+              </a:defRPr>
+            </a:pPr>
+            <a:r>
+              <a:t>🧠 Cognitive Bias: WYSIATI - What You See Is All There Is</a:t>
+            </a:r>
+          </a:p>
+        </p:txBody>
+      </p:sp>
+      <p:sp>
+        <p:nvSpPr>
+          <p:cNvPr id="4" name="TextBox 3"/>
+          <p:cNvSpPr txBox="1"/>
+          <p:nvPr/>
+        </p:nvSpPr>
+        <p:spPr>
+          <a:xfrm>
+            <a:off x="548640" y="1645920"/>
+            <a:ext cx="5120640" cy="4572000"/>
+          </a:xfrm>
+          <a:prstGeom prst="rect">
+            <a:avLst/>
+          </a:prstGeom>
+          <a:noFill/>
+        </p:spPr>
+        <p:txBody>
+          <a:bodyPr wrap="square">
+            <a:spAutoFit/>
+          </a:bodyPr>
+          <a:lstStyle/>
+          <a:p>
+            <a:pPr>
+              <a:defRPr sz="1500">
+                <a:solidFill>
+                  <a:srgbClr val="323232"/>
+                </a:solidFill>
+              </a:defRPr>
+            </a:pPr>
+            <a:r>
+              <a:t>📌 Context &amp; Instructions:</a:t>
             </a:r>
             <a:br/>
             <a:r>
-              <a:t>Criminal trial verdict based on one-sided evidence.</a:t>
-            </a:r>
-            <a:br/>
-          </a:p>
-          <a:p>
-            <a:pPr>
-              <a:defRPr sz="1200" b="1">
-                <a:solidFill>
-                  <a:srgbClr val="1E5AC8"/>
-                </a:solidFill>
-              </a:defRPr>
-            </a:pPr>
-            <a:r>
-              <a:t>🅰️ Gruppo A / Group A:</a:t>
-            </a:r>
-            <a:br/>
-            <a:r>
-              <a:t>Presented only with Defense testimony.</a:t>
-            </a:r>
-            <a:br/>
-            <a:r>
-              <a:t>Estimate guilt (0-100) and confidence (1-10).</a:t>
-            </a:r>
-            <a:br/>
-          </a:p>
-          <a:p>
-            <a:pPr>
-              <a:defRPr sz="1200" b="1">
-                <a:solidFill>
-                  <a:srgbClr val="C8325A"/>
-                </a:solidFill>
-              </a:defRPr>
-            </a:pPr>
-            <a:r>
-              <a:t>🅱️ Gruppo B / Group B:</a:t>
-            </a:r>
-            <a:br/>
-            <a:r>
-              <a:t>Presented only with Prosecution testimony.</a:t>
-            </a:r>
-            <a:br/>
-            <a:r>
-              <a:t>Estimate guilt (0-100) and confidence (1-10).</a:t>
-            </a:r>
-            <a:br/>
+              <a:t>Scan the QR code to read the court trial testimony provided and enter your verdict on guilt and your level of confidence.</a:t>
+            </a:r>
           </a:p>
         </p:txBody>
       </p:sp>
       <p:pic>
         <p:nvPicPr>
-          <p:cNvPr id="4" name="Picture 3" descr="WYSIATI_EN.png"/>
+          <p:cNvPr id="5" name="Picture 4" descr="WYSIATI_EN.png"/>
           <p:cNvPicPr>
             <a:picLocks noChangeAspect="1"/>
           </p:cNvPicPr>
@@ -5054,8 +5004,8 @@
         </p:blipFill>
         <p:spPr>
           <a:xfrm>
-            <a:off x="6035040" y="1645920"/>
-            <a:ext cx="2743200" cy="2743200"/>
+            <a:off x="5943600" y="1645920"/>
+            <a:ext cx="2926080" cy="2926080"/>
           </a:xfrm>
           <a:prstGeom prst="rect">
             <a:avLst/>
@@ -5064,14 +5014,14 @@
       </p:pic>
       <p:sp>
         <p:nvSpPr>
-          <p:cNvPr id="5" name="TextBox 4"/>
-          <p:cNvSpPr txBox="1"/>
-          <p:nvPr/>
-        </p:nvSpPr>
-        <p:spPr>
-          <a:xfrm>
-            <a:off x="5852160" y="4663440"/>
-            <a:ext cx="3108960" cy="1097280"/>
+          <p:cNvPr id="6" name="TextBox 5"/>
+          <p:cNvSpPr txBox="1"/>
+          <p:nvPr/>
+        </p:nvSpPr>
+        <p:spPr>
+          <a:xfrm>
+            <a:off x="5760720" y="4754880"/>
+            <a:ext cx="3291840" cy="1097280"/>
           </a:xfrm>
           <a:prstGeom prst="rect">
             <a:avLst/>
@@ -5145,7 +5095,7 @@
               </a:defRPr>
             </a:pPr>
             <a:r>
-              <a:t>1. Loftus &amp; Palmer — Car Crash Experiment (False Memories)</a:t>
+              <a:t>1. Car Crash Experiment (Loftus &amp; Palmer)</a:t>
             </a:r>
           </a:p>
         </p:txBody>
@@ -5158,8 +5108,8 @@
         </p:nvSpPr>
         <p:spPr>
           <a:xfrm>
-            <a:off x="548640" y="1188720"/>
-            <a:ext cx="5303520" cy="5029200"/>
+            <a:off x="548640" y="1005840"/>
+            <a:ext cx="8229600" cy="457200"/>
           </a:xfrm>
           <a:prstGeom prst="rect">
             <a:avLst/>
@@ -5173,76 +5123,65 @@
           <a:lstStyle/>
           <a:p>
             <a:pPr>
-              <a:defRPr sz="1300">
-                <a:solidFill>
-                  <a:srgbClr val="3C3C3C"/>
-                </a:solidFill>
-              </a:defRPr>
-            </a:pPr>
-            <a:r>
-              <a:t>📌 Scenario:</a:t>
+              <a:defRPr sz="1400" b="1">
+                <a:solidFill>
+                  <a:srgbClr val="FF6584"/>
+                </a:solidFill>
+              </a:defRPr>
+            </a:pPr>
+            <a:r>
+              <a:t>🧠 Cognitive Bias: False Memories &amp; Misinformation Effect</a:t>
+            </a:r>
+          </a:p>
+        </p:txBody>
+      </p:sp>
+      <p:sp>
+        <p:nvSpPr>
+          <p:cNvPr id="4" name="TextBox 3"/>
+          <p:cNvSpPr txBox="1"/>
+          <p:nvPr/>
+        </p:nvSpPr>
+        <p:spPr>
+          <a:xfrm>
+            <a:off x="548640" y="1645920"/>
+            <a:ext cx="5120640" cy="4572000"/>
+          </a:xfrm>
+          <a:prstGeom prst="rect">
+            <a:avLst/>
+          </a:prstGeom>
+          <a:noFill/>
+        </p:spPr>
+        <p:txBody>
+          <a:bodyPr wrap="square">
+            <a:spAutoFit/>
+          </a:bodyPr>
+          <a:lstStyle/>
+          <a:p>
+            <a:pPr>
+              <a:defRPr sz="1500">
+                <a:solidFill>
+                  <a:srgbClr val="323232"/>
+                </a:solidFill>
+              </a:defRPr>
+            </a:pPr>
+            <a:r>
+              <a:t>📌 Context &amp; Instructions:</a:t>
             </a:r>
             <a:br/>
             <a:r>
-              <a:t>You have just watched a short video clip of an automobile accident.</a:t>
+              <a:t>Watch the short video clip of the car accident shown in class.</a:t>
             </a:r>
             <a:br/>
-          </a:p>
-          <a:p>
-            <a:pPr>
-              <a:defRPr sz="1200" b="1">
-                <a:solidFill>
-                  <a:srgbClr val="1E5AC8"/>
-                </a:solidFill>
-              </a:defRPr>
-            </a:pPr>
-            <a:r>
-              <a:t>🅰️ Gruppo A / Group A:</a:t>
-            </a:r>
             <a:br/>
             <a:r>
-              <a:t>How fast (in km/h) were the cars going when they HIT each other?</a:t>
-            </a:r>
-            <a:br/>
-          </a:p>
-          <a:p>
-            <a:pPr>
-              <a:defRPr sz="1200" b="1">
-                <a:solidFill>
-                  <a:srgbClr val="C8325A"/>
-                </a:solidFill>
-              </a:defRPr>
-            </a:pPr>
-            <a:r>
-              <a:t>🅱️ Gruppo B / Group B:</a:t>
-            </a:r>
-            <a:br/>
-            <a:r>
-              <a:t>How fast (in km/h) were the cars going when they SMASHED into each other?</a:t>
-            </a:r>
-            <a:br/>
-          </a:p>
-          <a:p>
-            <a:pPr>
-              <a:defRPr sz="1100" i="1">
-                <a:solidFill>
-                  <a:srgbClr val="646464"/>
-                </a:solidFill>
-              </a:defRPr>
-            </a:pPr>
-            <a:r>
-              <a:t>💡 Extra:</a:t>
-            </a:r>
-            <a:br/>
-            <a:r>
-              <a:t>Common question: Did you see any broken glass on the ground? (Yes / No)</a:t>
+              <a:t>Then, scan the QR code to estimate the speed of the vehicles and answer the questions on your smartphone.</a:t>
             </a:r>
           </a:p>
         </p:txBody>
       </p:sp>
       <p:pic>
         <p:nvPicPr>
-          <p:cNvPr id="4" name="Picture 3" descr="Macchina_EN.png"/>
+          <p:cNvPr id="5" name="Picture 4" descr="Macchina_EN.png"/>
           <p:cNvPicPr>
             <a:picLocks noChangeAspect="1"/>
           </p:cNvPicPr>
@@ -5256,8 +5195,8 @@
         </p:blipFill>
         <p:spPr>
           <a:xfrm>
-            <a:off x="6035040" y="1645920"/>
-            <a:ext cx="2743200" cy="2743200"/>
+            <a:off x="5943600" y="1645920"/>
+            <a:ext cx="2926080" cy="2926080"/>
           </a:xfrm>
           <a:prstGeom prst="rect">
             <a:avLst/>
@@ -5266,14 +5205,14 @@
       </p:pic>
       <p:sp>
         <p:nvSpPr>
-          <p:cNvPr id="5" name="TextBox 4"/>
-          <p:cNvSpPr txBox="1"/>
-          <p:nvPr/>
-        </p:nvSpPr>
-        <p:spPr>
-          <a:xfrm>
-            <a:off x="5852160" y="4663440"/>
-            <a:ext cx="3108960" cy="1097280"/>
+          <p:cNvPr id="6" name="TextBox 5"/>
+          <p:cNvSpPr txBox="1"/>
+          <p:nvPr/>
+        </p:nvSpPr>
+        <p:spPr>
+          <a:xfrm>
+            <a:off x="5760720" y="4754880"/>
+            <a:ext cx="3291840" cy="1097280"/>
           </a:xfrm>
           <a:prstGeom prst="rect">
             <a:avLst/>
@@ -5347,7 +5286,7 @@
               </a:defRPr>
             </a:pPr>
             <a:r>
-              <a:t>19. Focusing Illusion — Life Satisfaction</a:t>
+              <a:t>19. Personal Wellbeing Survey</a:t>
             </a:r>
           </a:p>
         </p:txBody>
@@ -5360,8 +5299,8 @@
         </p:nvSpPr>
         <p:spPr>
           <a:xfrm>
-            <a:off x="548640" y="1188720"/>
-            <a:ext cx="5303520" cy="5029200"/>
+            <a:off x="548640" y="1005840"/>
+            <a:ext cx="8229600" cy="457200"/>
           </a:xfrm>
           <a:prstGeom prst="rect">
             <a:avLst/>
@@ -5375,68 +5314,60 @@
           <a:lstStyle/>
           <a:p>
             <a:pPr>
-              <a:defRPr sz="1300">
-                <a:solidFill>
-                  <a:srgbClr val="3C3C3C"/>
-                </a:solidFill>
-              </a:defRPr>
-            </a:pPr>
-            <a:r>
-              <a:t>📌 Scenario:</a:t>
+              <a:defRPr sz="1400" b="1">
+                <a:solidFill>
+                  <a:srgbClr val="FF6584"/>
+                </a:solidFill>
+              </a:defRPr>
+            </a:pPr>
+            <a:r>
+              <a:t>🧠 Cognitive Bias: Focusing Illusion</a:t>
+            </a:r>
+          </a:p>
+        </p:txBody>
+      </p:sp>
+      <p:sp>
+        <p:nvSpPr>
+          <p:cNvPr id="4" name="TextBox 3"/>
+          <p:cNvSpPr txBox="1"/>
+          <p:nvPr/>
+        </p:nvSpPr>
+        <p:spPr>
+          <a:xfrm>
+            <a:off x="548640" y="1645920"/>
+            <a:ext cx="5120640" cy="4572000"/>
+          </a:xfrm>
+          <a:prstGeom prst="rect">
+            <a:avLst/>
+          </a:prstGeom>
+          <a:noFill/>
+        </p:spPr>
+        <p:txBody>
+          <a:bodyPr wrap="square">
+            <a:spAutoFit/>
+          </a:bodyPr>
+          <a:lstStyle/>
+          <a:p>
+            <a:pPr>
+              <a:defRPr sz="1500">
+                <a:solidFill>
+                  <a:srgbClr val="323232"/>
+                </a:solidFill>
+              </a:defRPr>
+            </a:pPr>
+            <a:r>
+              <a:t>📌 Context &amp; Instructions:</a:t>
             </a:r>
             <a:br/>
             <a:r>
-              <a:t>Survey on happiness and dating frequency.</a:t>
-            </a:r>
-            <a:br/>
-          </a:p>
-          <a:p>
-            <a:pPr>
-              <a:defRPr sz="1200" b="1">
-                <a:solidFill>
-                  <a:srgbClr val="1E5AC8"/>
-                </a:solidFill>
-              </a:defRPr>
-            </a:pPr>
-            <a:r>
-              <a:t>🅰️ Gruppo A / Group A:</a:t>
-            </a:r>
-            <a:br/>
-            <a:r>
-              <a:t>1. How happy are you with your life (1-10)?</a:t>
-            </a:r>
-            <a:br/>
-            <a:r>
-              <a:t>2. How many dates in the last month?</a:t>
-            </a:r>
-            <a:br/>
-          </a:p>
-          <a:p>
-            <a:pPr>
-              <a:defRPr sz="1200" b="1">
-                <a:solidFill>
-                  <a:srgbClr val="C8325A"/>
-                </a:solidFill>
-              </a:defRPr>
-            </a:pPr>
-            <a:r>
-              <a:t>🅱️ Gruppo B / Group B:</a:t>
-            </a:r>
-            <a:br/>
-            <a:r>
-              <a:t>1. How many dates in the last month?</a:t>
-            </a:r>
-            <a:br/>
-            <a:r>
-              <a:t>2. How happy are you with your life (1-10)?</a:t>
-            </a:r>
-            <a:br/>
+              <a:t>Scan the QR code to complete a short survey regarding your general wellbeing and life satisfaction.</a:t>
+            </a:r>
           </a:p>
         </p:txBody>
       </p:sp>
       <p:pic>
         <p:nvPicPr>
-          <p:cNvPr id="4" name="Picture 3" descr="Illusione_Focalizzazione_EN.png"/>
+          <p:cNvPr id="5" name="Picture 4" descr="Illusione_Focalizzazione_EN.png"/>
           <p:cNvPicPr>
             <a:picLocks noChangeAspect="1"/>
           </p:cNvPicPr>
@@ -5450,8 +5381,8 @@
         </p:blipFill>
         <p:spPr>
           <a:xfrm>
-            <a:off x="6035040" y="1645920"/>
-            <a:ext cx="2743200" cy="2743200"/>
+            <a:off x="5943600" y="1645920"/>
+            <a:ext cx="2926080" cy="2926080"/>
           </a:xfrm>
           <a:prstGeom prst="rect">
             <a:avLst/>
@@ -5460,14 +5391,14 @@
       </p:pic>
       <p:sp>
         <p:nvSpPr>
-          <p:cNvPr id="5" name="TextBox 4"/>
-          <p:cNvSpPr txBox="1"/>
-          <p:nvPr/>
-        </p:nvSpPr>
-        <p:spPr>
-          <a:xfrm>
-            <a:off x="5852160" y="4663440"/>
-            <a:ext cx="3108960" cy="1097280"/>
+          <p:cNvPr id="6" name="TextBox 5"/>
+          <p:cNvSpPr txBox="1"/>
+          <p:nvPr/>
+        </p:nvSpPr>
+        <p:spPr>
+          <a:xfrm>
+            <a:off x="5760720" y="4754880"/>
+            <a:ext cx="3291840" cy="1097280"/>
           </a:xfrm>
           <a:prstGeom prst="rect">
             <a:avLst/>
@@ -5541,7 +5472,7 @@
               </a:defRPr>
             </a:pPr>
             <a:r>
-              <a:t>20. Base Rate Neglect — Diagnostic Paradox</a:t>
+              <a:t>20. The Diagnostic Paradox</a:t>
             </a:r>
           </a:p>
         </p:txBody>
@@ -5554,8 +5485,8 @@
         </p:nvSpPr>
         <p:spPr>
           <a:xfrm>
-            <a:off x="548640" y="1188720"/>
-            <a:ext cx="5303520" cy="5029200"/>
+            <a:off x="548640" y="1005840"/>
+            <a:ext cx="8229600" cy="457200"/>
           </a:xfrm>
           <a:prstGeom prst="rect">
             <a:avLst/>
@@ -5569,47 +5500,65 @@
           <a:lstStyle/>
           <a:p>
             <a:pPr>
-              <a:defRPr sz="1300">
-                <a:solidFill>
-                  <a:srgbClr val="3C3C3C"/>
-                </a:solidFill>
-              </a:defRPr>
-            </a:pPr>
-            <a:r>
-              <a:t>📌 Scenario:</a:t>
+              <a:defRPr sz="1400" b="1">
+                <a:solidFill>
+                  <a:srgbClr val="FF6584"/>
+                </a:solidFill>
+              </a:defRPr>
+            </a:pPr>
+            <a:r>
+              <a:t>🧠 Cognitive Bias: Base Rate Neglect</a:t>
+            </a:r>
+          </a:p>
+        </p:txBody>
+      </p:sp>
+      <p:sp>
+        <p:nvSpPr>
+          <p:cNvPr id="4" name="TextBox 3"/>
+          <p:cNvSpPr txBox="1"/>
+          <p:nvPr/>
+        </p:nvSpPr>
+        <p:spPr>
+          <a:xfrm>
+            <a:off x="548640" y="1645920"/>
+            <a:ext cx="5120640" cy="4572000"/>
+          </a:xfrm>
+          <a:prstGeom prst="rect">
+            <a:avLst/>
+          </a:prstGeom>
+          <a:noFill/>
+        </p:spPr>
+        <p:txBody>
+          <a:bodyPr wrap="square">
+            <a:spAutoFit/>
+          </a:bodyPr>
+          <a:lstStyle/>
+          <a:p>
+            <a:pPr>
+              <a:defRPr sz="1500">
+                <a:solidFill>
+                  <a:srgbClr val="323232"/>
+                </a:solidFill>
+              </a:defRPr>
+            </a:pPr>
+            <a:r>
+              <a:t>📌 Context &amp; Instructions:</a:t>
             </a:r>
             <a:br/>
             <a:r>
-              <a:t>A rare disease affects 1% of the population. A test is 95% accurate. You test POSITIVE.</a:t>
+              <a:t>A rare disease affects 1% of the population. A diagnostic test is 95% accurate. You test POSITIVE.</a:t>
             </a:r>
             <a:br/>
-          </a:p>
-          <a:p>
-            <a:pPr>
-              <a:defRPr sz="1300" b="1">
-                <a:solidFill>
-                  <a:srgbClr val="1E965A"/>
-                </a:solidFill>
-              </a:defRPr>
-            </a:pPr>
-            <a:r>
-              <a:t>❓ Domanda / Question:</a:t>
-            </a:r>
             <a:br/>
             <a:r>
-              <a:t>What is the actual probability (0-100%) that you actually have the disease?</a:t>
-            </a:r>
-            <a:br/>
-            <a:r>
-              <a:t>(True statistical answer: ~16%)</a:t>
-            </a:r>
-            <a:br/>
+              <a:t>Scan the QR code to estimate the actual probability of having the condition.</a:t>
+            </a:r>
           </a:p>
         </p:txBody>
       </p:sp>
       <p:pic>
         <p:nvPicPr>
-          <p:cNvPr id="4" name="Picture 3" descr="Base_Rate_Neglect_EN.png"/>
+          <p:cNvPr id="5" name="Picture 4" descr="Base_Rate_Neglect_EN.png"/>
           <p:cNvPicPr>
             <a:picLocks noChangeAspect="1"/>
           </p:cNvPicPr>
@@ -5623,8 +5572,8 @@
         </p:blipFill>
         <p:spPr>
           <a:xfrm>
-            <a:off x="6035040" y="1645920"/>
-            <a:ext cx="2743200" cy="2743200"/>
+            <a:off x="5943600" y="1645920"/>
+            <a:ext cx="2926080" cy="2926080"/>
           </a:xfrm>
           <a:prstGeom prst="rect">
             <a:avLst/>
@@ -5633,14 +5582,14 @@
       </p:pic>
       <p:sp>
         <p:nvSpPr>
-          <p:cNvPr id="5" name="TextBox 4"/>
-          <p:cNvSpPr txBox="1"/>
-          <p:nvPr/>
-        </p:nvSpPr>
-        <p:spPr>
-          <a:xfrm>
-            <a:off x="5852160" y="4663440"/>
-            <a:ext cx="3108960" cy="1097280"/>
+          <p:cNvPr id="6" name="TextBox 5"/>
+          <p:cNvSpPr txBox="1"/>
+          <p:nvPr/>
+        </p:nvSpPr>
+        <p:spPr>
+          <a:xfrm>
+            <a:off x="5760720" y="4754880"/>
+            <a:ext cx="3291840" cy="1097280"/>
           </a:xfrm>
           <a:prstGeom prst="rect">
             <a:avLst/>
@@ -5714,7 +5663,7 @@
               </a:defRPr>
             </a:pPr>
             <a:r>
-              <a:t>21. Decoy Effect — The Economist</a:t>
+              <a:t>21. Subscription Choice (The Economist)</a:t>
             </a:r>
           </a:p>
         </p:txBody>
@@ -5727,8 +5676,8 @@
         </p:nvSpPr>
         <p:spPr>
           <a:xfrm>
-            <a:off x="548640" y="1188720"/>
-            <a:ext cx="5303520" cy="5029200"/>
+            <a:off x="548640" y="1005840"/>
+            <a:ext cx="8229600" cy="457200"/>
           </a:xfrm>
           <a:prstGeom prst="rect">
             <a:avLst/>
@@ -5742,51 +5691,65 @@
           <a:lstStyle/>
           <a:p>
             <a:pPr>
-              <a:defRPr sz="1300">
-                <a:solidFill>
-                  <a:srgbClr val="3C3C3C"/>
-                </a:solidFill>
-              </a:defRPr>
-            </a:pPr>
-            <a:r>
-              <a:t>📌 Scenario:</a:t>
+              <a:defRPr sz="1400" b="1">
+                <a:solidFill>
+                  <a:srgbClr val="FF6584"/>
+                </a:solidFill>
+              </a:defRPr>
+            </a:pPr>
+            <a:r>
+              <a:t>🧠 Cognitive Bias: Decoy Effect &amp; Asymmetric Dominance</a:t>
+            </a:r>
+          </a:p>
+        </p:txBody>
+      </p:sp>
+      <p:sp>
+        <p:nvSpPr>
+          <p:cNvPr id="4" name="TextBox 3"/>
+          <p:cNvSpPr txBox="1"/>
+          <p:nvPr/>
+        </p:nvSpPr>
+        <p:spPr>
+          <a:xfrm>
+            <a:off x="548640" y="1645920"/>
+            <a:ext cx="5120640" cy="4572000"/>
+          </a:xfrm>
+          <a:prstGeom prst="rect">
+            <a:avLst/>
+          </a:prstGeom>
+          <a:noFill/>
+        </p:spPr>
+        <p:txBody>
+          <a:bodyPr wrap="square">
+            <a:spAutoFit/>
+          </a:bodyPr>
+          <a:lstStyle/>
+          <a:p>
+            <a:pPr>
+              <a:defRPr sz="1500">
+                <a:solidFill>
+                  <a:srgbClr val="323232"/>
+                </a:solidFill>
+              </a:defRPr>
+            </a:pPr>
+            <a:r>
+              <a:t>📌 Context &amp; Instructions:</a:t>
             </a:r>
             <a:br/>
             <a:r>
-              <a:t>Choose a subscription to The Economist:</a:t>
+              <a:t>You need to select a magazine subscription offer for The Economist that you find most advantageous.</a:t>
             </a:r>
             <a:br/>
-          </a:p>
-          <a:p>
-            <a:pPr>
-              <a:defRPr sz="1300" b="1">
-                <a:solidFill>
-                  <a:srgbClr val="1E965A"/>
-                </a:solidFill>
-              </a:defRPr>
-            </a:pPr>
-            <a:r>
-              <a:t>❓ Domanda / Question:</a:t>
-            </a:r>
             <a:br/>
             <a:r>
-              <a:t>A) Web Only ($50)</a:t>
-            </a:r>
-            <a:br/>
-            <a:r>
-              <a:t>B) Print Only ($120 - Decoy Option)</a:t>
-            </a:r>
-            <a:br/>
-            <a:r>
-              <a:t>C) Web + Print ($120)</a:t>
-            </a:r>
-            <a:br/>
+              <a:t>Scan the QR code with your smartphone to submit your choice.</a:t>
+            </a:r>
           </a:p>
         </p:txBody>
       </p:sp>
       <p:pic>
         <p:nvPicPr>
-          <p:cNvPr id="4" name="Picture 3" descr="L_Esca_EN.png"/>
+          <p:cNvPr id="5" name="Picture 4" descr="L_Esca_EN.png"/>
           <p:cNvPicPr>
             <a:picLocks noChangeAspect="1"/>
           </p:cNvPicPr>
@@ -5800,8 +5763,8 @@
         </p:blipFill>
         <p:spPr>
           <a:xfrm>
-            <a:off x="6035040" y="1645920"/>
-            <a:ext cx="2743200" cy="2743200"/>
+            <a:off x="5943600" y="1645920"/>
+            <a:ext cx="2926080" cy="2926080"/>
           </a:xfrm>
           <a:prstGeom prst="rect">
             <a:avLst/>
@@ -5810,14 +5773,14 @@
       </p:pic>
       <p:sp>
         <p:nvSpPr>
-          <p:cNvPr id="5" name="TextBox 4"/>
-          <p:cNvSpPr txBox="1"/>
-          <p:nvPr/>
-        </p:nvSpPr>
-        <p:spPr>
-          <a:xfrm>
-            <a:off x="5852160" y="4663440"/>
-            <a:ext cx="3108960" cy="1097280"/>
+          <p:cNvPr id="6" name="TextBox 5"/>
+          <p:cNvSpPr txBox="1"/>
+          <p:nvPr/>
+        </p:nvSpPr>
+        <p:spPr>
+          <a:xfrm>
+            <a:off x="5760720" y="4754880"/>
+            <a:ext cx="3291840" cy="1097280"/>
           </a:xfrm>
           <a:prstGeom prst="rect">
             <a:avLst/>
@@ -5891,7 +5854,7 @@
               </a:defRPr>
             </a:pPr>
             <a:r>
-              <a:t>22. Regression to the Mean — Praise vs Punishment</a:t>
+              <a:t>22. Flight Instruction Effect</a:t>
             </a:r>
           </a:p>
         </p:txBody>
@@ -5904,8 +5867,8 @@
         </p:nvSpPr>
         <p:spPr>
           <a:xfrm>
-            <a:off x="548640" y="1188720"/>
-            <a:ext cx="5303520" cy="5029200"/>
+            <a:off x="548640" y="1005840"/>
+            <a:ext cx="8229600" cy="457200"/>
           </a:xfrm>
           <a:prstGeom prst="rect">
             <a:avLst/>
@@ -5919,47 +5882,65 @@
           <a:lstStyle/>
           <a:p>
             <a:pPr>
-              <a:defRPr sz="1300">
-                <a:solidFill>
-                  <a:srgbClr val="3C3C3C"/>
-                </a:solidFill>
-              </a:defRPr>
-            </a:pPr>
-            <a:r>
-              <a:t>📌 Scenario:</a:t>
+              <a:defRPr sz="1400" b="1">
+                <a:solidFill>
+                  <a:srgbClr val="FF6584"/>
+                </a:solidFill>
+              </a:defRPr>
+            </a:pPr>
+            <a:r>
+              <a:t>🧠 Cognitive Bias: Causal Illusion vs Regression to the Mean</a:t>
+            </a:r>
+          </a:p>
+        </p:txBody>
+      </p:sp>
+      <p:sp>
+        <p:nvSpPr>
+          <p:cNvPr id="4" name="TextBox 3"/>
+          <p:cNvSpPr txBox="1"/>
+          <p:nvPr/>
+        </p:nvSpPr>
+        <p:spPr>
+          <a:xfrm>
+            <a:off x="548640" y="1645920"/>
+            <a:ext cx="5120640" cy="4572000"/>
+          </a:xfrm>
+          <a:prstGeom prst="rect">
+            <a:avLst/>
+          </a:prstGeom>
+          <a:noFill/>
+        </p:spPr>
+        <p:txBody>
+          <a:bodyPr wrap="square">
+            <a:spAutoFit/>
+          </a:bodyPr>
+          <a:lstStyle/>
+          <a:p>
+            <a:pPr>
+              <a:defRPr sz="1500">
+                <a:solidFill>
+                  <a:srgbClr val="323232"/>
+                </a:solidFill>
+              </a:defRPr>
+            </a:pPr>
+            <a:r>
+              <a:t>📌 Context &amp; Instructions:</a:t>
             </a:r>
             <a:br/>
             <a:r>
-              <a:t>Flight instructors notice reprimanding after a bad landing leads to a better landing, while praising leads to a worse one.</a:t>
+              <a:t>Flight instructors notice reprimanding after a bad landing leads to a better next landing, while praise leads to a worse one.</a:t>
             </a:r>
             <a:br/>
-          </a:p>
-          <a:p>
-            <a:pPr>
-              <a:defRPr sz="1300" b="1">
-                <a:solidFill>
-                  <a:srgbClr val="1E965A"/>
-                </a:solidFill>
-              </a:defRPr>
-            </a:pPr>
-            <a:r>
-              <a:t>❓ Domanda / Question:</a:t>
-            </a:r>
             <a:br/>
             <a:r>
-              <a:t>A) Psychological intuition (praise spoils, punishment works)</a:t>
-            </a:r>
-            <a:br/>
-            <a:r>
-              <a:t>B) Statistical effect (regression to the mean)</a:t>
-            </a:r>
-            <a:br/>
+              <a:t>Scan the QR code to evaluate why this phenomenon occurs.</a:t>
+            </a:r>
           </a:p>
         </p:txBody>
       </p:sp>
       <p:pic>
         <p:nvPicPr>
-          <p:cNvPr id="4" name="Picture 3" descr="Regressione_Media_EN.png"/>
+          <p:cNvPr id="5" name="Picture 4" descr="Regressione_Media_EN.png"/>
           <p:cNvPicPr>
             <a:picLocks noChangeAspect="1"/>
           </p:cNvPicPr>
@@ -5973,8 +5954,8 @@
         </p:blipFill>
         <p:spPr>
           <a:xfrm>
-            <a:off x="6035040" y="1645920"/>
-            <a:ext cx="2743200" cy="2743200"/>
+            <a:off x="5943600" y="1645920"/>
+            <a:ext cx="2926080" cy="2926080"/>
           </a:xfrm>
           <a:prstGeom prst="rect">
             <a:avLst/>
@@ -5983,14 +5964,14 @@
       </p:pic>
       <p:sp>
         <p:nvSpPr>
-          <p:cNvPr id="5" name="TextBox 4"/>
-          <p:cNvSpPr txBox="1"/>
-          <p:nvPr/>
-        </p:nvSpPr>
-        <p:spPr>
-          <a:xfrm>
-            <a:off x="5852160" y="4663440"/>
-            <a:ext cx="3108960" cy="1097280"/>
+          <p:cNvPr id="6" name="TextBox 5"/>
+          <p:cNvSpPr txBox="1"/>
+          <p:nvPr/>
+        </p:nvSpPr>
+        <p:spPr>
+          <a:xfrm>
+            <a:off x="5760720" y="4754880"/>
+            <a:ext cx="3291840" cy="1097280"/>
           </a:xfrm>
           <a:prstGeom prst="rect">
             <a:avLst/>
@@ -6064,7 +6045,7 @@
               </a:defRPr>
             </a:pPr>
             <a:r>
-              <a:t>2. Asian Disease Problem — Framing Effect</a:t>
+              <a:t>2. The Asian Disease Problem</a:t>
             </a:r>
           </a:p>
         </p:txBody>
@@ -6077,8 +6058,8 @@
         </p:nvSpPr>
         <p:spPr>
           <a:xfrm>
-            <a:off x="548640" y="1188720"/>
-            <a:ext cx="5303520" cy="5029200"/>
+            <a:off x="548640" y="1005840"/>
+            <a:ext cx="8229600" cy="457200"/>
           </a:xfrm>
           <a:prstGeom prst="rect">
             <a:avLst/>
@@ -6092,68 +6073,65 @@
           <a:lstStyle/>
           <a:p>
             <a:pPr>
-              <a:defRPr sz="1300">
-                <a:solidFill>
-                  <a:srgbClr val="3C3C3C"/>
-                </a:solidFill>
-              </a:defRPr>
-            </a:pPr>
-            <a:r>
-              <a:t>📌 Scenario:</a:t>
+              <a:defRPr sz="1400" b="1">
+                <a:solidFill>
+                  <a:srgbClr val="FF6584"/>
+                </a:solidFill>
+              </a:defRPr>
+            </a:pPr>
+            <a:r>
+              <a:t>🧠 Cognitive Bias: Framing Effect (Kahneman &amp; Tversky)</a:t>
+            </a:r>
+          </a:p>
+        </p:txBody>
+      </p:sp>
+      <p:sp>
+        <p:nvSpPr>
+          <p:cNvPr id="4" name="TextBox 3"/>
+          <p:cNvSpPr txBox="1"/>
+          <p:nvPr/>
+        </p:nvSpPr>
+        <p:spPr>
+          <a:xfrm>
+            <a:off x="548640" y="1645920"/>
+            <a:ext cx="5120640" cy="4572000"/>
+          </a:xfrm>
+          <a:prstGeom prst="rect">
+            <a:avLst/>
+          </a:prstGeom>
+          <a:noFill/>
+        </p:spPr>
+        <p:txBody>
+          <a:bodyPr wrap="square">
+            <a:spAutoFit/>
+          </a:bodyPr>
+          <a:lstStyle/>
+          <a:p>
+            <a:pPr>
+              <a:defRPr sz="1500">
+                <a:solidFill>
+                  <a:srgbClr val="323232"/>
+                </a:solidFill>
+              </a:defRPr>
+            </a:pPr>
+            <a:r>
+              <a:t>📌 Context &amp; Instructions:</a:t>
             </a:r>
             <a:br/>
             <a:r>
-              <a:t>An unusual Asian disease is expected to kill 600 people. Two programs proposed:</a:t>
+              <a:t>An unusual contagious disease is expected to kill 600 people. Two alternative healthcare programs have been proposed to combat the disease.</a:t>
             </a:r>
             <a:br/>
-          </a:p>
-          <a:p>
-            <a:pPr>
-              <a:defRPr sz="1200" b="1">
-                <a:solidFill>
-                  <a:srgbClr val="1E5AC8"/>
-                </a:solidFill>
-              </a:defRPr>
-            </a:pPr>
-            <a:r>
-              <a:t>🅰️ Gruppo A / Group A:</a:t>
-            </a:r>
             <a:br/>
             <a:r>
-              <a:t>Program A: 200 people saved for sure.</a:t>
-            </a:r>
-            <a:br/>
-            <a:r>
-              <a:t>Program B: 1/3 probability 600 saved, 2/3 nobody saved.</a:t>
-            </a:r>
-            <a:br/>
-          </a:p>
-          <a:p>
-            <a:pPr>
-              <a:defRPr sz="1200" b="1">
-                <a:solidFill>
-                  <a:srgbClr val="C8325A"/>
-                </a:solidFill>
-              </a:defRPr>
-            </a:pPr>
-            <a:r>
-              <a:t>🅱️ Gruppo B / Group B:</a:t>
-            </a:r>
-            <a:br/>
-            <a:r>
-              <a:t>Program A: 400 people die for sure.</a:t>
-            </a:r>
-            <a:br/>
-            <a:r>
-              <a:t>Program B: 1/3 probability nobody dies, 2/3 all 600 die.</a:t>
-            </a:r>
-            <a:br/>
+              <a:t>Scan the QR code with your smartphone to choose the best program according to you.</a:t>
+            </a:r>
           </a:p>
         </p:txBody>
       </p:sp>
       <p:pic>
         <p:nvPicPr>
-          <p:cNvPr id="4" name="Picture 3" descr="Malattia_Asiatica_EN.png"/>
+          <p:cNvPr id="5" name="Picture 4" descr="Malattia_Asiatica_EN.png"/>
           <p:cNvPicPr>
             <a:picLocks noChangeAspect="1"/>
           </p:cNvPicPr>
@@ -6167,8 +6145,8 @@
         </p:blipFill>
         <p:spPr>
           <a:xfrm>
-            <a:off x="6035040" y="1645920"/>
-            <a:ext cx="2743200" cy="2743200"/>
+            <a:off x="5943600" y="1645920"/>
+            <a:ext cx="2926080" cy="2926080"/>
           </a:xfrm>
           <a:prstGeom prst="rect">
             <a:avLst/>
@@ -6177,14 +6155,14 @@
       </p:pic>
       <p:sp>
         <p:nvSpPr>
-          <p:cNvPr id="5" name="TextBox 4"/>
-          <p:cNvSpPr txBox="1"/>
-          <p:nvPr/>
-        </p:nvSpPr>
-        <p:spPr>
-          <a:xfrm>
-            <a:off x="5852160" y="4663440"/>
-            <a:ext cx="3108960" cy="1097280"/>
+          <p:cNvPr id="6" name="TextBox 5"/>
+          <p:cNvSpPr txBox="1"/>
+          <p:nvPr/>
+        </p:nvSpPr>
+        <p:spPr>
+          <a:xfrm>
+            <a:off x="5760720" y="4754880"/>
+            <a:ext cx="3291840" cy="1097280"/>
           </a:xfrm>
           <a:prstGeom prst="rect">
             <a:avLst/>
@@ -6258,7 +6236,7 @@
               </a:defRPr>
             </a:pPr>
             <a:r>
-              <a:t>3. AI Robotic Surgery — Medical Framing</a:t>
+              <a:t>3. Robotic AI Surgery Authorization</a:t>
             </a:r>
           </a:p>
         </p:txBody>
@@ -6271,8 +6249,8 @@
         </p:nvSpPr>
         <p:spPr>
           <a:xfrm>
-            <a:off x="548640" y="1188720"/>
-            <a:ext cx="5303520" cy="5029200"/>
+            <a:off x="548640" y="1005840"/>
+            <a:ext cx="8229600" cy="457200"/>
           </a:xfrm>
           <a:prstGeom prst="rect">
             <a:avLst/>
@@ -6286,60 +6264,65 @@
           <a:lstStyle/>
           <a:p>
             <a:pPr>
-              <a:defRPr sz="1300">
-                <a:solidFill>
-                  <a:srgbClr val="3C3C3C"/>
-                </a:solidFill>
-              </a:defRPr>
-            </a:pPr>
-            <a:r>
-              <a:t>📌 Scenario:</a:t>
+              <a:defRPr sz="1400" b="1">
+                <a:solidFill>
+                  <a:srgbClr val="FF6584"/>
+                </a:solidFill>
+              </a:defRPr>
+            </a:pPr>
+            <a:r>
+              <a:t>🧠 Cognitive Bias: Medical Framing Effect (Positive vs Negative)</a:t>
+            </a:r>
+          </a:p>
+        </p:txBody>
+      </p:sp>
+      <p:sp>
+        <p:nvSpPr>
+          <p:cNvPr id="4" name="TextBox 3"/>
+          <p:cNvSpPr txBox="1"/>
+          <p:nvPr/>
+        </p:nvSpPr>
+        <p:spPr>
+          <a:xfrm>
+            <a:off x="548640" y="1645920"/>
+            <a:ext cx="5120640" cy="4572000"/>
+          </a:xfrm>
+          <a:prstGeom prst="rect">
+            <a:avLst/>
+          </a:prstGeom>
+          <a:noFill/>
+        </p:spPr>
+        <p:txBody>
+          <a:bodyPr wrap="square">
+            <a:spAutoFit/>
+          </a:bodyPr>
+          <a:lstStyle/>
+          <a:p>
+            <a:pPr>
+              <a:defRPr sz="1500">
+                <a:solidFill>
+                  <a:srgbClr val="323232"/>
+                </a:solidFill>
+              </a:defRPr>
+            </a:pPr>
+            <a:r>
+              <a:t>📌 Context &amp; Instructions:</a:t>
             </a:r>
             <a:br/>
             <a:r>
-              <a:t>An AI robotic surgical software will perform surgery on 100 patients in critical condition.</a:t>
+              <a:t>A new AI robotic surgical software is set to perform a high-risk operation on 100 critical patients.</a:t>
             </a:r>
             <a:br/>
-          </a:p>
-          <a:p>
-            <a:pPr>
-              <a:defRPr sz="1200" b="1">
-                <a:solidFill>
-                  <a:srgbClr val="1E5AC8"/>
-                </a:solidFill>
-              </a:defRPr>
-            </a:pPr>
-            <a:r>
-              <a:t>🅰️ Gruppo A / Group A:</a:t>
-            </a:r>
             <a:br/>
             <a:r>
-              <a:t>Statistical data: 90 patients will survive. Do you authorize the software? (Yes / No)</a:t>
-            </a:r>
-            <a:br/>
-          </a:p>
-          <a:p>
-            <a:pPr>
-              <a:defRPr sz="1200" b="1">
-                <a:solidFill>
-                  <a:srgbClr val="C8325A"/>
-                </a:solidFill>
-              </a:defRPr>
-            </a:pPr>
-            <a:r>
-              <a:t>🅱️ Gruppo B / Group B:</a:t>
-            </a:r>
-            <a:br/>
-            <a:r>
-              <a:t>Statistical data: 10 patients will die. Do you authorize the software? (Yes / No)</a:t>
-            </a:r>
-            <a:br/>
+              <a:t>Scan the QR code to read the statistical data and make your decision.</a:t>
+            </a:r>
           </a:p>
         </p:txBody>
       </p:sp>
       <p:pic>
         <p:nvPicPr>
-          <p:cNvPr id="4" name="Picture 3" descr="Framing_AI_EN.png"/>
+          <p:cNvPr id="5" name="Picture 4" descr="Framing_AI_EN.png"/>
           <p:cNvPicPr>
             <a:picLocks noChangeAspect="1"/>
           </p:cNvPicPr>
@@ -6353,8 +6336,8 @@
         </p:blipFill>
         <p:spPr>
           <a:xfrm>
-            <a:off x="6035040" y="1645920"/>
-            <a:ext cx="2743200" cy="2743200"/>
+            <a:off x="5943600" y="1645920"/>
+            <a:ext cx="2926080" cy="2926080"/>
           </a:xfrm>
           <a:prstGeom prst="rect">
             <a:avLst/>
@@ -6363,14 +6346,14 @@
       </p:pic>
       <p:sp>
         <p:nvSpPr>
-          <p:cNvPr id="5" name="TextBox 4"/>
-          <p:cNvSpPr txBox="1"/>
-          <p:nvPr/>
-        </p:nvSpPr>
-        <p:spPr>
-          <a:xfrm>
-            <a:off x="5852160" y="4663440"/>
-            <a:ext cx="3108960" cy="1097280"/>
+          <p:cNvPr id="6" name="TextBox 5"/>
+          <p:cNvSpPr txBox="1"/>
+          <p:nvPr/>
+        </p:nvSpPr>
+        <p:spPr>
+          <a:xfrm>
+            <a:off x="5760720" y="4754880"/>
+            <a:ext cx="3291840" cy="1097280"/>
           </a:xfrm>
           <a:prstGeom prst="rect">
             <a:avLst/>
@@ -6444,7 +6427,7 @@
               </a:defRPr>
             </a:pPr>
             <a:r>
-              <a:t>4. Anchoring Effect — Gandhi's Age</a:t>
+              <a:t>4. Mahatma Gandhi Age Estimation</a:t>
             </a:r>
           </a:p>
         </p:txBody>
@@ -6457,8 +6440,8 @@
         </p:nvSpPr>
         <p:spPr>
           <a:xfrm>
-            <a:off x="548640" y="1188720"/>
-            <a:ext cx="5303520" cy="5029200"/>
+            <a:off x="548640" y="1005840"/>
+            <a:ext cx="8229600" cy="457200"/>
           </a:xfrm>
           <a:prstGeom prst="rect">
             <a:avLst/>
@@ -6472,68 +6455,65 @@
           <a:lstStyle/>
           <a:p>
             <a:pPr>
-              <a:defRPr sz="1300">
-                <a:solidFill>
-                  <a:srgbClr val="3C3C3C"/>
-                </a:solidFill>
-              </a:defRPr>
-            </a:pPr>
-            <a:r>
-              <a:t>📌 Scenario:</a:t>
+              <a:defRPr sz="1400" b="1">
+                <a:solidFill>
+                  <a:srgbClr val="FF6584"/>
+                </a:solidFill>
+              </a:defRPr>
+            </a:pPr>
+            <a:r>
+              <a:t>🧠 Cognitive Bias: Anchoring Effect</a:t>
+            </a:r>
+          </a:p>
+        </p:txBody>
+      </p:sp>
+      <p:sp>
+        <p:nvSpPr>
+          <p:cNvPr id="4" name="TextBox 3"/>
+          <p:cNvSpPr txBox="1"/>
+          <p:nvPr/>
+        </p:nvSpPr>
+        <p:spPr>
+          <a:xfrm>
+            <a:off x="548640" y="1645920"/>
+            <a:ext cx="5120640" cy="4572000"/>
+          </a:xfrm>
+          <a:prstGeom prst="rect">
+            <a:avLst/>
+          </a:prstGeom>
+          <a:noFill/>
+        </p:spPr>
+        <p:txBody>
+          <a:bodyPr wrap="square">
+            <a:spAutoFit/>
+          </a:bodyPr>
+          <a:lstStyle/>
+          <a:p>
+            <a:pPr>
+              <a:defRPr sz="1500">
+                <a:solidFill>
+                  <a:srgbClr val="323232"/>
+                </a:solidFill>
+              </a:defRPr>
+            </a:pPr>
+            <a:r>
+              <a:t>📌 Context &amp; Instructions:</a:t>
             </a:r>
             <a:br/>
             <a:r>
-              <a:t>Estimating Mahatma Gandhi's age at death.</a:t>
+              <a:t>Test your knowledge with two questions regarding Mahatma Gandhi's life and age at death.</a:t>
             </a:r>
             <a:br/>
-          </a:p>
-          <a:p>
-            <a:pPr>
-              <a:defRPr sz="1200" b="1">
-                <a:solidFill>
-                  <a:srgbClr val="1E5AC8"/>
-                </a:solidFill>
-              </a:defRPr>
-            </a:pPr>
-            <a:r>
-              <a:t>🅰️ Gruppo A / Group A:</a:t>
-            </a:r>
             <a:br/>
             <a:r>
-              <a:t>1. Did Gandhi die before or after age 114?</a:t>
-            </a:r>
-            <a:br/>
-            <a:r>
-              <a:t>2. Estimate his exact age at death (years).</a:t>
-            </a:r>
-            <a:br/>
-          </a:p>
-          <a:p>
-            <a:pPr>
-              <a:defRPr sz="1200" b="1">
-                <a:solidFill>
-                  <a:srgbClr val="C8325A"/>
-                </a:solidFill>
-              </a:defRPr>
-            </a:pPr>
-            <a:r>
-              <a:t>🅱️ Gruppo B / Group B:</a:t>
-            </a:r>
-            <a:br/>
-            <a:r>
-              <a:t>1. Did Gandhi die before or after age 35?</a:t>
-            </a:r>
-            <a:br/>
-            <a:r>
-              <a:t>2. Estimate his exact age at death (years).</a:t>
-            </a:r>
-            <a:br/>
+              <a:t>Scan the QR code with your smartphone to enter your estimates.</a:t>
+            </a:r>
           </a:p>
         </p:txBody>
       </p:sp>
       <p:pic>
         <p:nvPicPr>
-          <p:cNvPr id="4" name="Picture 3" descr="Ancoraggio_Gandhi_EN.png"/>
+          <p:cNvPr id="5" name="Picture 4" descr="Ancoraggio_Gandhi_EN.png"/>
           <p:cNvPicPr>
             <a:picLocks noChangeAspect="1"/>
           </p:cNvPicPr>
@@ -6547,8 +6527,8 @@
         </p:blipFill>
         <p:spPr>
           <a:xfrm>
-            <a:off x="6035040" y="1645920"/>
-            <a:ext cx="2743200" cy="2743200"/>
+            <a:off x="5943600" y="1645920"/>
+            <a:ext cx="2926080" cy="2926080"/>
           </a:xfrm>
           <a:prstGeom prst="rect">
             <a:avLst/>
@@ -6557,14 +6537,14 @@
       </p:pic>
       <p:sp>
         <p:nvSpPr>
-          <p:cNvPr id="5" name="TextBox 4"/>
-          <p:cNvSpPr txBox="1"/>
-          <p:nvPr/>
-        </p:nvSpPr>
-        <p:spPr>
-          <a:xfrm>
-            <a:off x="5852160" y="4663440"/>
-            <a:ext cx="3108960" cy="1097280"/>
+          <p:cNvPr id="6" name="TextBox 5"/>
+          <p:cNvSpPr txBox="1"/>
+          <p:nvPr/>
+        </p:nvSpPr>
+        <p:spPr>
+          <a:xfrm>
+            <a:off x="5760720" y="4754880"/>
+            <a:ext cx="3291840" cy="1097280"/>
           </a:xfrm>
           <a:prstGeom prst="rect">
             <a:avLst/>
@@ -6638,7 +6618,7 @@
               </a:defRPr>
             </a:pPr>
             <a:r>
-              <a:t>5. Medical Anchoring — Roulette Wheel</a:t>
+              <a:t>5. Hospital Misdiagnosis Estimation</a:t>
             </a:r>
           </a:p>
         </p:txBody>
@@ -6651,8 +6631,8 @@
         </p:nvSpPr>
         <p:spPr>
           <a:xfrm>
-            <a:off x="548640" y="1188720"/>
-            <a:ext cx="5303520" cy="5029200"/>
+            <a:off x="548640" y="1005840"/>
+            <a:ext cx="8229600" cy="457200"/>
           </a:xfrm>
           <a:prstGeom prst="rect">
             <a:avLst/>
@@ -6666,68 +6646,65 @@
           <a:lstStyle/>
           <a:p>
             <a:pPr>
-              <a:defRPr sz="1300">
-                <a:solidFill>
-                  <a:srgbClr val="3C3C3C"/>
-                </a:solidFill>
-              </a:defRPr>
-            </a:pPr>
-            <a:r>
-              <a:t>📌 Scenario:</a:t>
+              <a:defRPr sz="1400" b="1">
+                <a:solidFill>
+                  <a:srgbClr val="FF6584"/>
+                </a:solidFill>
+              </a:defRPr>
+            </a:pPr>
+            <a:r>
+              <a:t>🧠 Cognitive Bias: Irrelevant Numerical Anchoring</a:t>
+            </a:r>
+          </a:p>
+        </p:txBody>
+      </p:sp>
+      <p:sp>
+        <p:nvSpPr>
+          <p:cNvPr id="4" name="TextBox 3"/>
+          <p:cNvSpPr txBox="1"/>
+          <p:nvPr/>
+        </p:nvSpPr>
+        <p:spPr>
+          <a:xfrm>
+            <a:off x="548640" y="1645920"/>
+            <a:ext cx="5120640" cy="4572000"/>
+          </a:xfrm>
+          <a:prstGeom prst="rect">
+            <a:avLst/>
+          </a:prstGeom>
+          <a:noFill/>
+        </p:spPr>
+        <p:txBody>
+          <a:bodyPr wrap="square">
+            <a:spAutoFit/>
+          </a:bodyPr>
+          <a:lstStyle/>
+          <a:p>
+            <a:pPr>
+              <a:defRPr sz="1500">
+                <a:solidFill>
+                  <a:srgbClr val="323232"/>
+                </a:solidFill>
+              </a:defRPr>
+            </a:pPr>
+            <a:r>
+              <a:t>📌 Context &amp; Instructions:</a:t>
             </a:r>
             <a:br/>
             <a:r>
-              <a:t>A roulette wheel spins an apparently random number before diagnostic estimation.</a:t>
+              <a:t>Observe the number spun on the wheel of fortune shown in class.</a:t>
             </a:r>
             <a:br/>
-          </a:p>
-          <a:p>
-            <a:pPr>
-              <a:defRPr sz="1200" b="1">
-                <a:solidFill>
-                  <a:srgbClr val="1E5AC8"/>
-                </a:solidFill>
-              </a:defRPr>
-            </a:pPr>
-            <a:r>
-              <a:t>🅰️ Gruppo A / Group A:</a:t>
-            </a:r>
             <a:br/>
             <a:r>
-              <a:t>Wheel number: 12</a:t>
-            </a:r>
-            <a:br/>
-            <a:r>
-              <a:t>Question: What % of misdiagnoses are caused by doctor fatigue?</a:t>
-            </a:r>
-            <a:br/>
-          </a:p>
-          <a:p>
-            <a:pPr>
-              <a:defRPr sz="1200" b="1">
-                <a:solidFill>
-                  <a:srgbClr val="C8325A"/>
-                </a:solidFill>
-              </a:defRPr>
-            </a:pPr>
-            <a:r>
-              <a:t>🅱️ Gruppo B / Group B:</a:t>
-            </a:r>
-            <a:br/>
-            <a:r>
-              <a:t>Wheel number: 65</a:t>
-            </a:r>
-            <a:br/>
-            <a:r>
-              <a:t>Question: What % of misdiagnoses are caused by doctor fatigue?</a:t>
-            </a:r>
-            <a:br/>
+              <a:t>Then, scan the QR code to provide your estimate of the percentage of hospital misdiagnoses.</a:t>
+            </a:r>
           </a:p>
         </p:txBody>
       </p:sp>
       <p:pic>
         <p:nvPicPr>
-          <p:cNvPr id="4" name="Picture 3" descr="Ancoraggio_Roulette_EN.png"/>
+          <p:cNvPr id="5" name="Picture 4" descr="Ancoraggio_Roulette_EN.png"/>
           <p:cNvPicPr>
             <a:picLocks noChangeAspect="1"/>
           </p:cNvPicPr>
@@ -6741,8 +6718,8 @@
         </p:blipFill>
         <p:spPr>
           <a:xfrm>
-            <a:off x="6035040" y="1645920"/>
-            <a:ext cx="2743200" cy="2743200"/>
+            <a:off x="5943600" y="1645920"/>
+            <a:ext cx="2926080" cy="2926080"/>
           </a:xfrm>
           <a:prstGeom prst="rect">
             <a:avLst/>
@@ -6751,14 +6728,14 @@
       </p:pic>
       <p:sp>
         <p:nvSpPr>
-          <p:cNvPr id="5" name="TextBox 4"/>
-          <p:cNvSpPr txBox="1"/>
-          <p:nvPr/>
-        </p:nvSpPr>
-        <p:spPr>
-          <a:xfrm>
-            <a:off x="5852160" y="4663440"/>
-            <a:ext cx="3108960" cy="1097280"/>
+          <p:cNvPr id="6" name="TextBox 5"/>
+          <p:cNvSpPr txBox="1"/>
+          <p:nvPr/>
+        </p:nvSpPr>
+        <p:spPr>
+          <a:xfrm>
+            <a:off x="5760720" y="4754880"/>
+            <a:ext cx="3291840" cy="1097280"/>
           </a:xfrm>
           <a:prstGeom prst="rect">
             <a:avLst/>
@@ -6832,7 +6809,7 @@
               </a:defRPr>
             </a:pPr>
             <a:r>
-              <a:t>6. Loss Aversion — Financial Risk Decisions</a:t>
+              <a:t>6. Financial Decision &amp; Risk Choice</a:t>
             </a:r>
           </a:p>
         </p:txBody>
@@ -6845,8 +6822,8 @@
         </p:nvSpPr>
         <p:spPr>
           <a:xfrm>
-            <a:off x="548640" y="1188720"/>
-            <a:ext cx="5303520" cy="5029200"/>
+            <a:off x="548640" y="1005840"/>
+            <a:ext cx="8229600" cy="457200"/>
           </a:xfrm>
           <a:prstGeom prst="rect">
             <a:avLst/>
@@ -6860,76 +6837,65 @@
           <a:lstStyle/>
           <a:p>
             <a:pPr>
-              <a:defRPr sz="1300">
-                <a:solidFill>
-                  <a:srgbClr val="3C3C3C"/>
-                </a:solidFill>
-              </a:defRPr>
-            </a:pPr>
-            <a:r>
-              <a:t>📌 Scenario:</a:t>
+              <a:defRPr sz="1400" b="1">
+                <a:solidFill>
+                  <a:srgbClr val="FF6584"/>
+                </a:solidFill>
+              </a:defRPr>
+            </a:pPr>
+            <a:r>
+              <a:t>🧠 Cognitive Bias: Loss Aversion &amp; Prospect Theory</a:t>
+            </a:r>
+          </a:p>
+        </p:txBody>
+      </p:sp>
+      <p:sp>
+        <p:nvSpPr>
+          <p:cNvPr id="4" name="TextBox 3"/>
+          <p:cNvSpPr txBox="1"/>
+          <p:nvPr/>
+        </p:nvSpPr>
+        <p:spPr>
+          <a:xfrm>
+            <a:off x="548640" y="1645920"/>
+            <a:ext cx="5120640" cy="4572000"/>
+          </a:xfrm>
+          <a:prstGeom prst="rect">
+            <a:avLst/>
+          </a:prstGeom>
+          <a:noFill/>
+        </p:spPr>
+        <p:txBody>
+          <a:bodyPr wrap="square">
+            <a:spAutoFit/>
+          </a:bodyPr>
+          <a:lstStyle/>
+          <a:p>
+            <a:pPr>
+              <a:defRPr sz="1500">
+                <a:solidFill>
+                  <a:srgbClr val="323232"/>
+                </a:solidFill>
+              </a:defRPr>
+            </a:pPr>
+            <a:r>
+              <a:t>📌 Context &amp; Instructions:</a:t>
             </a:r>
             <a:br/>
             <a:r>
-              <a:t>Evaluating risk choices between certain gains and certain losses.</a:t>
+              <a:t>You are presented with a financial scenario involving an initial bonus and two alternative financial options.</a:t>
             </a:r>
             <a:br/>
-          </a:p>
-          <a:p>
-            <a:pPr>
-              <a:defRPr sz="1200" b="1">
-                <a:solidFill>
-                  <a:srgbClr val="1E5AC8"/>
-                </a:solidFill>
-              </a:defRPr>
-            </a:pPr>
-            <a:r>
-              <a:t>🅰️ Gruppo A / Group A:</a:t>
-            </a:r>
             <a:br/>
             <a:r>
-              <a:t>You are given €1,000.</a:t>
-            </a:r>
-            <a:br/>
-            <a:r>
-              <a:t>A) Win €500 more for sure (100%)</a:t>
-            </a:r>
-            <a:br/>
-            <a:r>
-              <a:t>B) Coin flip: 50% win €1,000, 50% win €0</a:t>
-            </a:r>
-            <a:br/>
-          </a:p>
-          <a:p>
-            <a:pPr>
-              <a:defRPr sz="1200" b="1">
-                <a:solidFill>
-                  <a:srgbClr val="C8325A"/>
-                </a:solidFill>
-              </a:defRPr>
-            </a:pPr>
-            <a:r>
-              <a:t>🅱️ Gruppo B / Group B:</a:t>
-            </a:r>
-            <a:br/>
-            <a:r>
-              <a:t>You are given €2,000.</a:t>
-            </a:r>
-            <a:br/>
-            <a:r>
-              <a:t>A) Lose €500 for sure (100%)</a:t>
-            </a:r>
-            <a:br/>
-            <a:r>
-              <a:t>B) Coin flip: 50% lose €1,000, 50% lose €0</a:t>
-            </a:r>
-            <a:br/>
+              <a:t>Scan the QR code on your smartphone to pick your preferred option.</a:t>
+            </a:r>
           </a:p>
         </p:txBody>
       </p:sp>
       <p:pic>
         <p:nvPicPr>
-          <p:cNvPr id="4" name="Picture 3" descr="Avversione_Perdite_EN.png"/>
+          <p:cNvPr id="5" name="Picture 4" descr="Avversione_Perdite_EN.png"/>
           <p:cNvPicPr>
             <a:picLocks noChangeAspect="1"/>
           </p:cNvPicPr>
@@ -6943,8 +6909,8 @@
         </p:blipFill>
         <p:spPr>
           <a:xfrm>
-            <a:off x="6035040" y="1645920"/>
-            <a:ext cx="2743200" cy="2743200"/>
+            <a:off x="5943600" y="1645920"/>
+            <a:ext cx="2926080" cy="2926080"/>
           </a:xfrm>
           <a:prstGeom prst="rect">
             <a:avLst/>
@@ -6953,14 +6919,14 @@
       </p:pic>
       <p:sp>
         <p:nvSpPr>
-          <p:cNvPr id="5" name="TextBox 4"/>
-          <p:cNvSpPr txBox="1"/>
-          <p:nvPr/>
-        </p:nvSpPr>
-        <p:spPr>
-          <a:xfrm>
-            <a:off x="5852160" y="4663440"/>
-            <a:ext cx="3108960" cy="1097280"/>
+          <p:cNvPr id="6" name="TextBox 5"/>
+          <p:cNvSpPr txBox="1"/>
+          <p:nvPr/>
+        </p:nvSpPr>
+        <p:spPr>
+          <a:xfrm>
+            <a:off x="5760720" y="4754880"/>
+            <a:ext cx="3291840" cy="1097280"/>
           </a:xfrm>
           <a:prstGeom prst="rect">
             <a:avLst/>
@@ -7034,7 +7000,7 @@
               </a:defRPr>
             </a:pPr>
             <a:r>
-              <a:t>7. Illusion of Truth — Font Legibility Effect</a:t>
+              <a:t>7. Scientific Statement Evaluation</a:t>
             </a:r>
           </a:p>
         </p:txBody>
@@ -7047,8 +7013,8 @@
         </p:nvSpPr>
         <p:spPr>
           <a:xfrm>
-            <a:off x="548640" y="1188720"/>
-            <a:ext cx="5303520" cy="5029200"/>
+            <a:off x="548640" y="1005840"/>
+            <a:ext cx="8229600" cy="457200"/>
           </a:xfrm>
           <a:prstGeom prst="rect">
             <a:avLst/>
@@ -7062,76 +7028,60 @@
           <a:lstStyle/>
           <a:p>
             <a:pPr>
-              <a:defRPr sz="1300">
-                <a:solidFill>
-                  <a:srgbClr val="3C3C3C"/>
-                </a:solidFill>
-              </a:defRPr>
-            </a:pPr>
-            <a:r>
-              <a:t>📌 Scenario:</a:t>
+              <a:defRPr sz="1400" b="1">
+                <a:solidFill>
+                  <a:srgbClr val="FF6584"/>
+                </a:solidFill>
+              </a:defRPr>
+            </a:pPr>
+            <a:r>
+              <a:t>🧠 Cognitive Bias: Illusion of Truth &amp; Cognitive Ease</a:t>
+            </a:r>
+          </a:p>
+        </p:txBody>
+      </p:sp>
+      <p:sp>
+        <p:nvSpPr>
+          <p:cNvPr id="4" name="TextBox 3"/>
+          <p:cNvSpPr txBox="1"/>
+          <p:nvPr/>
+        </p:nvSpPr>
+        <p:spPr>
+          <a:xfrm>
+            <a:off x="548640" y="1645920"/>
+            <a:ext cx="5120640" cy="4572000"/>
+          </a:xfrm>
+          <a:prstGeom prst="rect">
+            <a:avLst/>
+          </a:prstGeom>
+          <a:noFill/>
+        </p:spPr>
+        <p:txBody>
+          <a:bodyPr wrap="square">
+            <a:spAutoFit/>
+          </a:bodyPr>
+          <a:lstStyle/>
+          <a:p>
+            <a:pPr>
+              <a:defRPr sz="1500">
+                <a:solidFill>
+                  <a:srgbClr val="323232"/>
+                </a:solidFill>
+              </a:defRPr>
+            </a:pPr>
+            <a:r>
+              <a:t>📌 Context &amp; Instructions:</a:t>
             </a:r>
             <a:br/>
             <a:r>
-              <a:t>Evaluation of statement: 'Taking Omega-3 reduces bodily inflammation by 15%.'</a:t>
-            </a:r>
-            <a:br/>
-          </a:p>
-          <a:p>
-            <a:pPr>
-              <a:defRPr sz="1200" b="1">
-                <a:solidFill>
-                  <a:srgbClr val="1E5AC8"/>
-                </a:solidFill>
-              </a:defRPr>
-            </a:pPr>
-            <a:r>
-              <a:t>🅰️ Gruppo A / Group A:</a:t>
-            </a:r>
-            <a:br/>
-            <a:r>
-              <a:t>Presented in high-contrast bold Arial font.</a:t>
-            </a:r>
-            <a:br/>
-          </a:p>
-          <a:p>
-            <a:pPr>
-              <a:defRPr sz="1200" b="1">
-                <a:solidFill>
-                  <a:srgbClr val="C8325A"/>
-                </a:solidFill>
-              </a:defRPr>
-            </a:pPr>
-            <a:r>
-              <a:t>🅱️ Gruppo B / Group B:</a:t>
-            </a:r>
-            <a:br/>
-            <a:r>
-              <a:t>Presented in low-contrast faded Comic Sans font.</a:t>
-            </a:r>
-            <a:br/>
-          </a:p>
-          <a:p>
-            <a:pPr>
-              <a:defRPr sz="1100" i="1">
-                <a:solidFill>
-                  <a:srgbClr val="646464"/>
-                </a:solidFill>
-              </a:defRPr>
-            </a:pPr>
-            <a:r>
-              <a:t>💡 Extra:</a:t>
-            </a:r>
-            <a:br/>
-            <a:r>
-              <a:t>Question: On a scale of 1 to 10, how true and scientific does this statement seem?</a:t>
+              <a:t>Scan the QR code with your smartphone camera to read the scientific statement presented and rate how true it seems to you (1-10).</a:t>
             </a:r>
           </a:p>
         </p:txBody>
       </p:sp>
       <p:pic>
         <p:nvPicPr>
-          <p:cNvPr id="4" name="Picture 3" descr="Illusione_Verita_EN.png"/>
+          <p:cNvPr id="5" name="Picture 4" descr="Illusione_Verita_EN.png"/>
           <p:cNvPicPr>
             <a:picLocks noChangeAspect="1"/>
           </p:cNvPicPr>
@@ -7145,8 +7095,8 @@
         </p:blipFill>
         <p:spPr>
           <a:xfrm>
-            <a:off x="6035040" y="1645920"/>
-            <a:ext cx="2743200" cy="2743200"/>
+            <a:off x="5943600" y="1645920"/>
+            <a:ext cx="2926080" cy="2926080"/>
           </a:xfrm>
           <a:prstGeom prst="rect">
             <a:avLst/>
@@ -7155,14 +7105,14 @@
       </p:pic>
       <p:sp>
         <p:nvSpPr>
-          <p:cNvPr id="5" name="TextBox 4"/>
-          <p:cNvSpPr txBox="1"/>
-          <p:nvPr/>
-        </p:nvSpPr>
-        <p:spPr>
-          <a:xfrm>
-            <a:off x="5852160" y="4663440"/>
-            <a:ext cx="3108960" cy="1097280"/>
+          <p:cNvPr id="6" name="TextBox 5"/>
+          <p:cNvSpPr txBox="1"/>
+          <p:nvPr/>
+        </p:nvSpPr>
+        <p:spPr>
+          <a:xfrm>
+            <a:off x="5760720" y="4754880"/>
+            <a:ext cx="3291840" cy="1097280"/>
           </a:xfrm>
           <a:prstGeom prst="rect">
             <a:avLst/>
@@ -7236,7 +7186,7 @@
               </a:defRPr>
             </a:pPr>
             <a:r>
-              <a:t>8. Availability Heuristic — Memory Recall</a:t>
+              <a:t>8. Personality Inventory (Assertiveness)</a:t>
             </a:r>
           </a:p>
         </p:txBody>
@@ -7249,8 +7199,8 @@
         </p:nvSpPr>
         <p:spPr>
           <a:xfrm>
-            <a:off x="548640" y="1188720"/>
-            <a:ext cx="5303520" cy="5029200"/>
+            <a:off x="548640" y="1005840"/>
+            <a:ext cx="8229600" cy="457200"/>
           </a:xfrm>
           <a:prstGeom prst="rect">
             <a:avLst/>
@@ -7264,68 +7214,60 @@
           <a:lstStyle/>
           <a:p>
             <a:pPr>
-              <a:defRPr sz="1300">
-                <a:solidFill>
-                  <a:srgbClr val="3C3C3C"/>
-                </a:solidFill>
-              </a:defRPr>
-            </a:pPr>
-            <a:r>
-              <a:t>📌 Scenario:</a:t>
+              <a:defRPr sz="1400" b="1">
+                <a:solidFill>
+                  <a:srgbClr val="FF6584"/>
+                </a:solidFill>
+              </a:defRPr>
+            </a:pPr>
+            <a:r>
+              <a:t>🧠 Cognitive Bias: Availability Heuristic &amp; Subjective Ease of Recall</a:t>
+            </a:r>
+          </a:p>
+        </p:txBody>
+      </p:sp>
+      <p:sp>
+        <p:nvSpPr>
+          <p:cNvPr id="4" name="TextBox 3"/>
+          <p:cNvSpPr txBox="1"/>
+          <p:nvPr/>
+        </p:nvSpPr>
+        <p:spPr>
+          <a:xfrm>
+            <a:off x="548640" y="1645920"/>
+            <a:ext cx="5120640" cy="4572000"/>
+          </a:xfrm>
+          <a:prstGeom prst="rect">
+            <a:avLst/>
+          </a:prstGeom>
+          <a:noFill/>
+        </p:spPr>
+        <p:txBody>
+          <a:bodyPr wrap="square">
+            <a:spAutoFit/>
+          </a:bodyPr>
+          <a:lstStyle/>
+          <a:p>
+            <a:pPr>
+              <a:defRPr sz="1500">
+                <a:solidFill>
+                  <a:srgbClr val="323232"/>
+                </a:solidFill>
+              </a:defRPr>
+            </a:pPr>
+            <a:r>
+              <a:t>📌 Context &amp; Instructions:</a:t>
             </a:r>
             <a:br/>
             <a:r>
-              <a:t>Recalling assertive personal behaviors.</a:t>
-            </a:r>
-            <a:br/>
-          </a:p>
-          <a:p>
-            <a:pPr>
-              <a:defRPr sz="1200" b="1">
-                <a:solidFill>
-                  <a:srgbClr val="1E5AC8"/>
-                </a:solidFill>
-              </a:defRPr>
-            </a:pPr>
-            <a:r>
-              <a:t>🅰️ Gruppo A / Group A:</a:t>
-            </a:r>
-            <a:br/>
-            <a:r>
-              <a:t>1. List 2 situations where you were assertive.</a:t>
-            </a:r>
-            <a:br/>
-            <a:r>
-              <a:t>2. Rate how assertive you consider yourself (1-10).</a:t>
-            </a:r>
-            <a:br/>
-          </a:p>
-          <a:p>
-            <a:pPr>
-              <a:defRPr sz="1200" b="1">
-                <a:solidFill>
-                  <a:srgbClr val="C8325A"/>
-                </a:solidFill>
-              </a:defRPr>
-            </a:pPr>
-            <a:r>
-              <a:t>🅱️ Gruppo B / Group B:</a:t>
-            </a:r>
-            <a:br/>
-            <a:r>
-              <a:t>1. List 12 situations where you were assertive.</a:t>
-            </a:r>
-            <a:br/>
-            <a:r>
-              <a:t>2. Rate how assertive you consider yourself (1-10).</a:t>
-            </a:r>
-            <a:br/>
+              <a:t>Scan the QR code from your smartphone to complete a short memory recall exercise on your past behaviors and rate your personal level of assertiveness.</a:t>
+            </a:r>
           </a:p>
         </p:txBody>
       </p:sp>
       <p:pic>
         <p:nvPicPr>
-          <p:cNvPr id="4" name="Picture 3" descr="Euristica_Disponibilita_EN.png"/>
+          <p:cNvPr id="5" name="Picture 4" descr="Euristica_Disponibilita_EN.png"/>
           <p:cNvPicPr>
             <a:picLocks noChangeAspect="1"/>
           </p:cNvPicPr>
@@ -7339,8 +7281,8 @@
         </p:blipFill>
         <p:spPr>
           <a:xfrm>
-            <a:off x="6035040" y="1645920"/>
-            <a:ext cx="2743200" cy="2743200"/>
+            <a:off x="5943600" y="1645920"/>
+            <a:ext cx="2926080" cy="2926080"/>
           </a:xfrm>
           <a:prstGeom prst="rect">
             <a:avLst/>
@@ -7349,14 +7291,14 @@
       </p:pic>
       <p:sp>
         <p:nvSpPr>
-          <p:cNvPr id="5" name="TextBox 4"/>
-          <p:cNvSpPr txBox="1"/>
-          <p:nvPr/>
-        </p:nvSpPr>
-        <p:spPr>
-          <a:xfrm>
-            <a:off x="5852160" y="4663440"/>
-            <a:ext cx="3108960" cy="1097280"/>
+          <p:cNvPr id="6" name="TextBox 5"/>
+          <p:cNvSpPr txBox="1"/>
+          <p:nvPr/>
+        </p:nvSpPr>
+        <p:spPr>
+          <a:xfrm>
+            <a:off x="5760720" y="4754880"/>
+            <a:ext cx="3291840" cy="1097280"/>
           </a:xfrm>
           <a:prstGeom prst="rect">
             <a:avLst/>

--- a/QR_Experiments_Cognitive_Biases_EN.pptx
+++ b/QR_Experiments_Cognitive_Biases_EN.pptx
@@ -28,6 +28,7 @@
     <p:sldId id="276" r:id="rId27"/>
     <p:sldId id="277" r:id="rId28"/>
     <p:sldId id="278" r:id="rId29"/>
+    <p:sldId id="279" r:id="rId30"/>
   </p:sldIdLst>
   <p:sldSz cx="9144000" cy="6858000" type="screen4x3"/>
   <p:notesSz cx="6858000" cy="9144000"/>
@@ -4909,7 +4910,7 @@
               </a:defRPr>
             </a:pPr>
             <a:r>
-              <a:t>18. Court Trial Verdict Decision</a:t>
+              <a:t>18. WYSIATI — Hypothesis Persistence (Bruner &amp; Potter)</a:t>
             </a:r>
           </a:p>
         </p:txBody>
@@ -4944,7 +4945,7 @@
               </a:defRPr>
             </a:pPr>
             <a:r>
-              <a:t>🧠 Cognitive Bias: WYSIATI - What You See Is All There Is</a:t>
+              <a:t>🧠 Cognitive Bias: WYSIATI ('What You See Is All There Is') &amp; Belief Perseverance</a:t>
             </a:r>
           </a:p>
         </p:txBody>
@@ -4983,7 +4984,12 @@
             </a:r>
             <a:br/>
             <a:r>
-              <a:t>Scan the QR code to read the court trial testimony provided and enter your verdict on guilt and your level of confidence.</a:t>
+              <a:t>Observe the image shown on your smartphone after scanning the QR code.</a:t>
+            </a:r>
+            <a:br/>
+            <a:br/>
+            <a:r>
+              <a:t>In Group A the image sharpens smoothly and continuously (video-like over 8s); in Group B it transitions through 4 discrete step frames (discrete jumps every 2s).</a:t>
             </a:r>
           </a:p>
         </p:txBody>
@@ -5941,6 +5947,197 @@
       <p:pic>
         <p:nvPicPr>
           <p:cNvPr id="5" name="Picture 4" descr="Regressione_Media_EN.png"/>
+          <p:cNvPicPr>
+            <a:picLocks noChangeAspect="1"/>
+          </p:cNvPicPr>
+          <p:nvPr/>
+        </p:nvPicPr>
+        <p:blipFill>
+          <a:blip r:embed="rId2"/>
+          <a:stretch>
+            <a:fillRect/>
+          </a:stretch>
+        </p:blipFill>
+        <p:spPr>
+          <a:xfrm>
+            <a:off x="5943600" y="1645920"/>
+            <a:ext cx="2926080" cy="2926080"/>
+          </a:xfrm>
+          <a:prstGeom prst="rect">
+            <a:avLst/>
+          </a:prstGeom>
+        </p:spPr>
+      </p:pic>
+      <p:sp>
+        <p:nvSpPr>
+          <p:cNvPr id="6" name="TextBox 5"/>
+          <p:cNvSpPr txBox="1"/>
+          <p:nvPr/>
+        </p:nvSpPr>
+        <p:spPr>
+          <a:xfrm>
+            <a:off x="5760720" y="4754880"/>
+            <a:ext cx="3291840" cy="1097280"/>
+          </a:xfrm>
+          <a:prstGeom prst="rect">
+            <a:avLst/>
+          </a:prstGeom>
+          <a:noFill/>
+        </p:spPr>
+        <p:txBody>
+          <a:bodyPr wrap="square">
+            <a:spAutoFit/>
+          </a:bodyPr>
+          <a:lstStyle/>
+          <a:p>
+            <a:pPr algn="ctr">
+              <a:defRPr sz="1400" b="1">
+                <a:solidFill>
+                  <a:srgbClr val="6C63FF"/>
+                </a:solidFill>
+              </a:defRPr>
+            </a:pPr>
+            <a:r>
+              <a:t>📱 Scan the QR code with your smartphone camera to participate</a:t>
+            </a:r>
+          </a:p>
+        </p:txBody>
+      </p:sp>
+    </p:spTree>
+  </p:cSld>
+  <p:clrMapOvr>
+    <a:masterClrMapping/>
+  </p:clrMapOvr>
+</p:sld>
+</file>
+
+<file path=ppt/slides/slide24.xml><?xml version="1.0" encoding="utf-8"?>
+<p:sld xmlns:a="http://schemas.openxmlformats.org/drawingml/2006/main" xmlns:p="http://schemas.openxmlformats.org/presentationml/2006/main" xmlns:r="http://schemas.openxmlformats.org/officeDocument/2006/relationships">
+  <p:cSld>
+    <p:spTree>
+      <p:nvGrpSpPr>
+        <p:cNvPr id="1" name=""/>
+        <p:cNvGrpSpPr/>
+        <p:nvPr/>
+      </p:nvGrpSpPr>
+      <p:grpSpPr/>
+      <p:sp>
+        <p:nvSpPr>
+          <p:cNvPr id="2" name="TextBox 1"/>
+          <p:cNvSpPr txBox="1"/>
+          <p:nvPr/>
+        </p:nvSpPr>
+        <p:spPr>
+          <a:xfrm>
+            <a:off x="548640" y="365760"/>
+            <a:ext cx="8229600" cy="731520"/>
+          </a:xfrm>
+          <a:prstGeom prst="rect">
+            <a:avLst/>
+          </a:prstGeom>
+          <a:noFill/>
+        </p:spPr>
+        <p:txBody>
+          <a:bodyPr wrap="square">
+            <a:spAutoFit/>
+          </a:bodyPr>
+          <a:lstStyle/>
+          <a:p>
+            <a:pPr>
+              <a:defRPr sz="2200" b="1">
+                <a:solidFill>
+                  <a:srgbClr val="6C63FF"/>
+                </a:solidFill>
+              </a:defRPr>
+            </a:pPr>
+            <a:r>
+              <a:t>23. The 2 - 4 - 6 Task</a:t>
+            </a:r>
+          </a:p>
+        </p:txBody>
+      </p:sp>
+      <p:sp>
+        <p:nvSpPr>
+          <p:cNvPr id="3" name="TextBox 2"/>
+          <p:cNvSpPr txBox="1"/>
+          <p:nvPr/>
+        </p:nvSpPr>
+        <p:spPr>
+          <a:xfrm>
+            <a:off x="548640" y="1005840"/>
+            <a:ext cx="8229600" cy="457200"/>
+          </a:xfrm>
+          <a:prstGeom prst="rect">
+            <a:avLst/>
+          </a:prstGeom>
+          <a:noFill/>
+        </p:spPr>
+        <p:txBody>
+          <a:bodyPr wrap="square">
+            <a:spAutoFit/>
+          </a:bodyPr>
+          <a:lstStyle/>
+          <a:p>
+            <a:pPr>
+              <a:defRPr sz="1400" b="1">
+                <a:solidFill>
+                  <a:srgbClr val="FF6584"/>
+                </a:solidFill>
+              </a:defRPr>
+            </a:pPr>
+            <a:r>
+              <a:t>🧠 Cognitive Bias: Confirmation Bias &amp; Hypothesis Testing (Wason, 1960)</a:t>
+            </a:r>
+          </a:p>
+        </p:txBody>
+      </p:sp>
+      <p:sp>
+        <p:nvSpPr>
+          <p:cNvPr id="4" name="TextBox 3"/>
+          <p:cNvSpPr txBox="1"/>
+          <p:nvPr/>
+        </p:nvSpPr>
+        <p:spPr>
+          <a:xfrm>
+            <a:off x="548640" y="1645920"/>
+            <a:ext cx="5120640" cy="4572000"/>
+          </a:xfrm>
+          <a:prstGeom prst="rect">
+            <a:avLst/>
+          </a:prstGeom>
+          <a:noFill/>
+        </p:spPr>
+        <p:txBody>
+          <a:bodyPr wrap="square">
+            <a:spAutoFit/>
+          </a:bodyPr>
+          <a:lstStyle/>
+          <a:p>
+            <a:pPr>
+              <a:defRPr sz="1500">
+                <a:solidFill>
+                  <a:srgbClr val="323232"/>
+                </a:solidFill>
+              </a:defRPr>
+            </a:pPr>
+            <a:r>
+              <a:t>📌 Context &amp; Instructions:</a:t>
+            </a:r>
+            <a:br/>
+            <a:r>
+              <a:t>You are shown the number sequence 2 - 4 - 6, which follows a secret rule created by the instructor.</a:t>
+            </a:r>
+            <a:br/>
+            <a:br/>
+            <a:r>
+              <a:t>Scan the QR code to choose which triplet of numbers you will test first to discover the rule.</a:t>
+            </a:r>
+          </a:p>
+        </p:txBody>
+      </p:sp>
+      <p:pic>
+        <p:nvPicPr>
+          <p:cNvPr id="5" name="Picture 4" descr="Bias_Conferma_Wason_EN.png"/>
           <p:cNvPicPr>
             <a:picLocks noChangeAspect="1"/>
           </p:cNvPicPr>
